--- a/presentation/Cadence_Interview_Presentation.pptx
+++ b/presentation/Cadence_Interview_Presentation.pptx
@@ -29,6 +29,12 @@
     <p:sldId id="277" r:id="rId29"/>
     <p:sldId id="278" r:id="rId30"/>
     <p:sldId id="279" r:id="rId31"/>
+    <p:sldId id="280" r:id="rId32"/>
+    <p:sldId id="281" r:id="rId33"/>
+    <p:sldId id="282" r:id="rId34"/>
+    <p:sldId id="283" r:id="rId35"/>
+    <p:sldId id="284" r:id="rId36"/>
+    <p:sldId id="285" r:id="rId37"/>
   </p:sldIdLst>
   <p:sldSz cx="12191695" cy="6858000" type="screen4x3"/>
   <p:notesSz cx="6858000" cy="9144000"/>
@@ -1670,6 +1676,356 @@
 </p:notes>
 </file>
 
+<file path=ppt/notesSlides/notesSlide25.xml><?xml version="1.0" encoding="utf-8"?>
+<p:notes xmlns:a="http://schemas.openxmlformats.org/drawingml/2006/main" xmlns:p="http://schemas.openxmlformats.org/presentationml/2006/main" xmlns:r="http://schemas.openxmlformats.org/officeDocument/2006/relationships">
+  <p:cSld>
+    <p:spTree>
+      <p:nvGrpSpPr>
+        <p:cNvPr id="1" name=""/>
+        <p:cNvGrpSpPr/>
+        <p:nvPr/>
+      </p:nvGrpSpPr>
+      <p:grpSpPr>
+        <a:xfrm>
+          <a:off x="0" y="0"/>
+          <a:ext cx="0" cy="0"/>
+          <a:chOff x="0" y="0"/>
+          <a:chExt cx="0" cy="0"/>
+        </a:xfrm>
+      </p:grpSpPr>
+      <p:sp>
+        <p:nvSpPr>
+          <p:cNvPr id="2" name="Slide Image Placeholder 1"/>
+          <p:cNvSpPr>
+            <a:spLocks noGrp="1"/>
+          </p:cNvSpPr>
+          <p:nvPr>
+            <p:ph type="sldImg" idx="2"/>
+          </p:nvPr>
+        </p:nvSpPr>
+        <p:spPr/>
+      </p:sp>
+      <p:sp>
+        <p:nvSpPr>
+          <p:cNvPr id="3" name="Notes Placeholder 2"/>
+          <p:cNvSpPr>
+            <a:spLocks noGrp="1"/>
+          </p:cNvSpPr>
+          <p:nvPr>
+            <p:ph type="body" idx="3" sz="quarter"/>
+          </p:nvPr>
+        </p:nvSpPr>
+        <p:spPr/>
+        <p:txBody>
+          <a:bodyPr/>
+          <a:lstStyle/>
+          <a:p>
+            <a:r>
+              <a:t>These are examples from the three provided artifacts. Quoted snippets are source text; masked versions illustrate intended behavior and are not new accuracy measurements. The retained source extraction is in data/extracted.</a:t>
+            </a:r>
+          </a:p>
+        </p:txBody>
+      </p:sp>
+      <p:sp>
+        <p:nvSpPr>
+          <p:cNvPr id="4" name="Slide Number Placeholder 3"/>
+          <p:cNvSpPr>
+            <a:spLocks noGrp="1"/>
+          </p:cNvSpPr>
+          <p:nvPr>
+            <p:ph type="sldNum" idx="5" sz="quarter"/>
+          </p:nvPr>
+        </p:nvSpPr>
+        <p:spPr/>
+      </p:sp>
+    </p:spTree>
+  </p:cSld>
+  <p:clrMapOvr>
+    <a:masterClrMapping/>
+  </p:clrMapOvr>
+</p:notes>
+</file>
+
+<file path=ppt/notesSlides/notesSlide26.xml><?xml version="1.0" encoding="utf-8"?>
+<p:notes xmlns:a="http://schemas.openxmlformats.org/drawingml/2006/main" xmlns:p="http://schemas.openxmlformats.org/presentationml/2006/main" xmlns:r="http://schemas.openxmlformats.org/officeDocument/2006/relationships">
+  <p:cSld>
+    <p:spTree>
+      <p:nvGrpSpPr>
+        <p:cNvPr id="1" name=""/>
+        <p:cNvGrpSpPr/>
+        <p:nvPr/>
+      </p:nvGrpSpPr>
+      <p:grpSpPr>
+        <a:xfrm>
+          <a:off x="0" y="0"/>
+          <a:ext cx="0" cy="0"/>
+          <a:chOff x="0" y="0"/>
+          <a:chExt cx="0" cy="0"/>
+        </a:xfrm>
+      </p:grpSpPr>
+      <p:sp>
+        <p:nvSpPr>
+          <p:cNvPr id="2" name="Slide Image Placeholder 1"/>
+          <p:cNvSpPr>
+            <a:spLocks noGrp="1"/>
+          </p:cNvSpPr>
+          <p:nvPr>
+            <p:ph type="sldImg" idx="2"/>
+          </p:nvPr>
+        </p:nvSpPr>
+        <p:spPr/>
+      </p:sp>
+      <p:sp>
+        <p:nvSpPr>
+          <p:cNvPr id="3" name="Notes Placeholder 2"/>
+          <p:cNvSpPr>
+            <a:spLocks noGrp="1"/>
+          </p:cNvSpPr>
+          <p:nvPr>
+            <p:ph type="body" idx="3" sz="quarter"/>
+          </p:nvPr>
+        </p:nvSpPr>
+        <p:spPr/>
+        <p:txBody>
+          <a:bodyPr/>
+          <a:lstStyle/>
+          <a:p>
+            <a:r>
+              <a:t>Source file: Cadence_Financial_Group_Organizational_Pack.pptx. Extraction reference: ppt/slides/slide3.xml:shape:12:paragraph:1. The email is quoted from the supplied artifact. Explain that nearby names are separate findings; this example isolates one email. Native text avoids OCR errors, but chart relationships still need structure review.</a:t>
+            </a:r>
+          </a:p>
+        </p:txBody>
+      </p:sp>
+      <p:sp>
+        <p:nvSpPr>
+          <p:cNvPr id="4" name="Slide Number Placeholder 3"/>
+          <p:cNvSpPr>
+            <a:spLocks noGrp="1"/>
+          </p:cNvSpPr>
+          <p:nvPr>
+            <p:ph type="sldNum" idx="5" sz="quarter"/>
+          </p:nvPr>
+        </p:nvSpPr>
+        <p:spPr/>
+      </p:sp>
+    </p:spTree>
+  </p:cSld>
+  <p:clrMapOvr>
+    <a:masterClrMapping/>
+  </p:clrMapOvr>
+</p:notes>
+</file>
+
+<file path=ppt/notesSlides/notesSlide27.xml><?xml version="1.0" encoding="utf-8"?>
+<p:notes xmlns:a="http://schemas.openxmlformats.org/drawingml/2006/main" xmlns:p="http://schemas.openxmlformats.org/presentationml/2006/main" xmlns:r="http://schemas.openxmlformats.org/officeDocument/2006/relationships">
+  <p:cSld>
+    <p:spTree>
+      <p:nvGrpSpPr>
+        <p:cNvPr id="1" name=""/>
+        <p:cNvGrpSpPr/>
+        <p:nvPr/>
+      </p:nvGrpSpPr>
+      <p:grpSpPr>
+        <a:xfrm>
+          <a:off x="0" y="0"/>
+          <a:ext cx="0" cy="0"/>
+          <a:chOff x="0" y="0"/>
+          <a:chExt cx="0" cy="0"/>
+        </a:xfrm>
+      </p:grpSpPr>
+      <p:sp>
+        <p:nvSpPr>
+          <p:cNvPr id="2" name="Slide Image Placeholder 1"/>
+          <p:cNvSpPr>
+            <a:spLocks noGrp="1"/>
+          </p:cNvSpPr>
+          <p:nvPr>
+            <p:ph type="sldImg" idx="2"/>
+          </p:nvPr>
+        </p:nvSpPr>
+        <p:spPr/>
+      </p:sp>
+      <p:sp>
+        <p:nvSpPr>
+          <p:cNvPr id="3" name="Notes Placeholder 2"/>
+          <p:cNvSpPr>
+            <a:spLocks noGrp="1"/>
+          </p:cNvSpPr>
+          <p:nvPr>
+            <p:ph type="body" idx="3" sz="quarter"/>
+          </p:nvPr>
+        </p:nvSpPr>
+        <p:spPr/>
+        <p:txBody>
+          <a:bodyPr/>
+          <a:lstStyle/>
+          <a:p>
+            <a:r>
+              <a:t>Source file: Cadence_Group_Risk_Management_Policy__v6.0.pdf. Reference pdf:page:1:ocr_line:8. The cached OCR line has approximately 92.2/100 confidence; this is engine confidence, not measured PII accuracy. Document-level incompleteness can still block export. The masked text is illustrative.</a:t>
+            </a:r>
+          </a:p>
+        </p:txBody>
+      </p:sp>
+      <p:sp>
+        <p:nvSpPr>
+          <p:cNvPr id="4" name="Slide Number Placeholder 3"/>
+          <p:cNvSpPr>
+            <a:spLocks noGrp="1"/>
+          </p:cNvSpPr>
+          <p:nvPr>
+            <p:ph type="sldNum" idx="5" sz="quarter"/>
+          </p:nvPr>
+        </p:nvSpPr>
+        <p:spPr/>
+      </p:sp>
+    </p:spTree>
+  </p:cSld>
+  <p:clrMapOvr>
+    <a:masterClrMapping/>
+  </p:clrMapOvr>
+</p:notes>
+</file>
+
+<file path=ppt/notesSlides/notesSlide28.xml><?xml version="1.0" encoding="utf-8"?>
+<p:notes xmlns:a="http://schemas.openxmlformats.org/drawingml/2006/main" xmlns:p="http://schemas.openxmlformats.org/presentationml/2006/main" xmlns:r="http://schemas.openxmlformats.org/officeDocument/2006/relationships">
+  <p:cSld>
+    <p:spTree>
+      <p:nvGrpSpPr>
+        <p:cNvPr id="1" name=""/>
+        <p:cNvGrpSpPr/>
+        <p:nvPr/>
+      </p:nvGrpSpPr>
+      <p:grpSpPr>
+        <a:xfrm>
+          <a:off x="0" y="0"/>
+          <a:ext cx="0" cy="0"/>
+          <a:chOff x="0" y="0"/>
+          <a:chExt cx="0" cy="0"/>
+        </a:xfrm>
+      </p:grpSpPr>
+      <p:sp>
+        <p:nvSpPr>
+          <p:cNvPr id="2" name="Slide Image Placeholder 1"/>
+          <p:cNvSpPr>
+            <a:spLocks noGrp="1"/>
+          </p:cNvSpPr>
+          <p:nvPr>
+            <p:ph type="sldImg" idx="2"/>
+          </p:nvPr>
+        </p:nvSpPr>
+        <p:spPr/>
+      </p:sp>
+      <p:sp>
+        <p:nvSpPr>
+          <p:cNvPr id="3" name="Notes Placeholder 2"/>
+          <p:cNvSpPr>
+            <a:spLocks noGrp="1"/>
+          </p:cNvSpPr>
+          <p:nvPr>
+            <p:ph type="body" idx="3" sz="quarter"/>
+          </p:nvPr>
+        </p:nvSpPr>
+        <p:spPr/>
+        <p:txBody>
+          <a:bodyPr/>
+          <a:lstStyle/>
+          <a:p>
+            <a:r>
+              <a:t>Source file: Cadence_TPRM_Training.docx. Reference word/document.xml:paragraph:12. This is a negative example: vendor onboarding is a process, not automatically PII. Explain native XML and image OCR as separate extraction tasks. This does not claim that the detector never makes false positives.</a:t>
+            </a:r>
+          </a:p>
+        </p:txBody>
+      </p:sp>
+      <p:sp>
+        <p:nvSpPr>
+          <p:cNvPr id="4" name="Slide Number Placeholder 3"/>
+          <p:cNvSpPr>
+            <a:spLocks noGrp="1"/>
+          </p:cNvSpPr>
+          <p:nvPr>
+            <p:ph type="sldNum" idx="5" sz="quarter"/>
+          </p:nvPr>
+        </p:nvSpPr>
+        <p:spPr/>
+      </p:sp>
+    </p:spTree>
+  </p:cSld>
+  <p:clrMapOvr>
+    <a:masterClrMapping/>
+  </p:clrMapOvr>
+</p:notes>
+</file>
+
+<file path=ppt/notesSlides/notesSlide29.xml><?xml version="1.0" encoding="utf-8"?>
+<p:notes xmlns:a="http://schemas.openxmlformats.org/drawingml/2006/main" xmlns:p="http://schemas.openxmlformats.org/presentationml/2006/main" xmlns:r="http://schemas.openxmlformats.org/officeDocument/2006/relationships">
+  <p:cSld>
+    <p:spTree>
+      <p:nvGrpSpPr>
+        <p:cNvPr id="1" name=""/>
+        <p:cNvGrpSpPr/>
+        <p:nvPr/>
+      </p:nvGrpSpPr>
+      <p:grpSpPr>
+        <a:xfrm>
+          <a:off x="0" y="0"/>
+          <a:ext cx="0" cy="0"/>
+          <a:chOff x="0" y="0"/>
+          <a:chExt cx="0" cy="0"/>
+        </a:xfrm>
+      </p:grpSpPr>
+      <p:sp>
+        <p:nvSpPr>
+          <p:cNvPr id="2" name="Slide Image Placeholder 1"/>
+          <p:cNvSpPr>
+            <a:spLocks noGrp="1"/>
+          </p:cNvSpPr>
+          <p:nvPr>
+            <p:ph type="sldImg" idx="2"/>
+          </p:nvPr>
+        </p:nvSpPr>
+        <p:spPr/>
+      </p:sp>
+      <p:sp>
+        <p:nvSpPr>
+          <p:cNvPr id="3" name="Notes Placeholder 2"/>
+          <p:cNvSpPr>
+            <a:spLocks noGrp="1"/>
+          </p:cNvSpPr>
+          <p:nvPr>
+            <p:ph type="body" idx="3" sz="quarter"/>
+          </p:nvPr>
+        </p:nvSpPr>
+        <p:spPr/>
+        <p:txBody>
+          <a:bodyPr/>
+          <a:lstStyle/>
+          <a:p>
+            <a:r>
+              <a:t>Reference word/document.xml:table:13:row:1:column:2:paragraph:1. Table numbering follows extractor references, which need not match visible Word table labels. This example demonstrates intended classification and context preservation, not a new test result.</a:t>
+            </a:r>
+          </a:p>
+        </p:txBody>
+      </p:sp>
+      <p:sp>
+        <p:nvSpPr>
+          <p:cNvPr id="4" name="Slide Number Placeholder 3"/>
+          <p:cNvSpPr>
+            <a:spLocks noGrp="1"/>
+          </p:cNvSpPr>
+          <p:nvPr>
+            <p:ph type="sldNum" idx="5" sz="quarter"/>
+          </p:nvPr>
+        </p:nvSpPr>
+        <p:spPr/>
+      </p:sp>
+    </p:spTree>
+  </p:cSld>
+  <p:clrMapOvr>
+    <a:masterClrMapping/>
+  </p:clrMapOvr>
+</p:notes>
+</file>
+
 <file path=ppt/notesSlides/notesSlide3.xml><?xml version="1.0" encoding="utf-8"?>
 <p:notes xmlns:a="http://schemas.openxmlformats.org/drawingml/2006/main" xmlns:p="http://schemas.openxmlformats.org/presentationml/2006/main" xmlns:r="http://schemas.openxmlformats.org/officeDocument/2006/relationships">
   <p:cSld>
@@ -1716,6 +2072,76 @@
           <a:p>
             <a:r>
               <a:t>These are requirements, not achieved accuracy claims. The original brief asks for a 10–15 minute walkthrough. Use the deeper slides as backup when judges ask questions.</a:t>
+            </a:r>
+          </a:p>
+        </p:txBody>
+      </p:sp>
+      <p:sp>
+        <p:nvSpPr>
+          <p:cNvPr id="4" name="Slide Number Placeholder 3"/>
+          <p:cNvSpPr>
+            <a:spLocks noGrp="1"/>
+          </p:cNvSpPr>
+          <p:nvPr>
+            <p:ph type="sldNum" idx="5" sz="quarter"/>
+          </p:nvPr>
+        </p:nvSpPr>
+        <p:spPr/>
+      </p:sp>
+    </p:spTree>
+  </p:cSld>
+  <p:clrMapOvr>
+    <a:masterClrMapping/>
+  </p:clrMapOvr>
+</p:notes>
+</file>
+
+<file path=ppt/notesSlides/notesSlide30.xml><?xml version="1.0" encoding="utf-8"?>
+<p:notes xmlns:a="http://schemas.openxmlformats.org/drawingml/2006/main" xmlns:p="http://schemas.openxmlformats.org/presentationml/2006/main" xmlns:r="http://schemas.openxmlformats.org/officeDocument/2006/relationships">
+  <p:cSld>
+    <p:spTree>
+      <p:nvGrpSpPr>
+        <p:cNvPr id="1" name=""/>
+        <p:cNvGrpSpPr/>
+        <p:nvPr/>
+      </p:nvGrpSpPr>
+      <p:grpSpPr>
+        <a:xfrm>
+          <a:off x="0" y="0"/>
+          <a:ext cx="0" cy="0"/>
+          <a:chOff x="0" y="0"/>
+          <a:chExt cx="0" cy="0"/>
+        </a:xfrm>
+      </p:grpSpPr>
+      <p:sp>
+        <p:nvSpPr>
+          <p:cNvPr id="2" name="Slide Image Placeholder 1"/>
+          <p:cNvSpPr>
+            <a:spLocks noGrp="1"/>
+          </p:cNvSpPr>
+          <p:nvPr>
+            <p:ph type="sldImg" idx="2"/>
+          </p:nvPr>
+        </p:nvSpPr>
+        <p:spPr/>
+      </p:sp>
+      <p:sp>
+        <p:nvSpPr>
+          <p:cNvPr id="3" name="Notes Placeholder 2"/>
+          <p:cNvSpPr>
+            <a:spLocks noGrp="1"/>
+          </p:cNvSpPr>
+          <p:nvPr>
+            <p:ph type="body" idx="3" sz="quarter"/>
+          </p:nvPr>
+        </p:nvSpPr>
+        <p:spPr/>
+        <p:txBody>
+          <a:bodyPr/>
+          <a:lstStyle/>
+          <a:p>
+            <a:r>
+              <a:t>Suggested explanation: The PowerPoint shows precise masking, the policy demonstrates OCR risk, and the Word document shows why context must remain. Allow about two minutes for these backup examples. Do not claim that illustrative masking is an independently audited full-source result.</a:t>
             </a:r>
           </a:p>
         </p:txBody>
@@ -5199,7 +5625,7 @@
               </a:defRPr>
             </a:pPr>
             <a:r>
-              <a:t>CADENCE FINANCIAL GROUP  /  CASE STUDY 02</a:t>
+              <a:t>CADDET FINANCIAL GROUP  /  CASE STUDY 02</a:t>
             </a:r>
           </a:p>
         </p:txBody>
@@ -5238,7 +5664,7 @@
               </a:defRPr>
             </a:pPr>
             <a:r>
-              <a:t>Cadence: text analysis and PII detection</a:t>
+              <a:t>Caddet: text analysis and PII detection</a:t>
             </a:r>
           </a:p>
         </p:txBody>
@@ -5430,7 +5856,7 @@
               </a:defRPr>
             </a:pPr>
             <a:r>
-              <a:t>Text analysis and PII detection | Interview walkthrough</a:t>
+              <a:t>Team 57</a:t>
             </a:r>
           </a:p>
         </p:txBody>
@@ -5550,7 +5976,7 @@
               </a:defRPr>
             </a:pPr>
             <a:r>
-              <a:t>CADENCE FINANCIAL GROUP  /  CASE STUDY 02</a:t>
+              <a:t>CADDET FINANCIAL GROUP  /  CASE STUDY 02</a:t>
             </a:r>
           </a:p>
         </p:txBody>
@@ -5813,7 +6239,7 @@
               </a:defRPr>
             </a:pPr>
             <a:r>
-              <a:t>Text analysis and PII detection | Interview walkthrough</a:t>
+              <a:t>Team 57</a:t>
             </a:r>
           </a:p>
         </p:txBody>
@@ -5933,7 +6359,7 @@
               </a:defRPr>
             </a:pPr>
             <a:r>
-              <a:t>CADENCE FINANCIAL GROUP  /  CASE STUDY 02</a:t>
+              <a:t>CADDET FINANCIAL GROUP  /  CASE STUDY 02</a:t>
             </a:r>
           </a:p>
         </p:txBody>
@@ -6196,7 +6622,7 @@
               </a:defRPr>
             </a:pPr>
             <a:r>
-              <a:t>Text analysis and PII detection | Interview walkthrough</a:t>
+              <a:t>Team 57</a:t>
             </a:r>
           </a:p>
         </p:txBody>
@@ -6316,7 +6742,7 @@
               </a:defRPr>
             </a:pPr>
             <a:r>
-              <a:t>CADENCE FINANCIAL GROUP  /  CASE STUDY 02</a:t>
+              <a:t>CADDET FINANCIAL GROUP  /  CASE STUDY 02</a:t>
             </a:r>
           </a:p>
         </p:txBody>
@@ -6579,7 +7005,7 @@
               </a:defRPr>
             </a:pPr>
             <a:r>
-              <a:t>Text analysis and PII detection | Interview walkthrough</a:t>
+              <a:t>Team 57</a:t>
             </a:r>
           </a:p>
         </p:txBody>
@@ -6699,7 +7125,7 @@
               </a:defRPr>
             </a:pPr>
             <a:r>
-              <a:t>CADENCE FINANCIAL GROUP  /  CASE STUDY 02</a:t>
+              <a:t>CADDET FINANCIAL GROUP  /  CASE STUDY 02</a:t>
             </a:r>
           </a:p>
         </p:txBody>
@@ -6962,7 +7388,7 @@
               </a:defRPr>
             </a:pPr>
             <a:r>
-              <a:t>Text analysis and PII detection | Interview walkthrough</a:t>
+              <a:t>Team 57</a:t>
             </a:r>
           </a:p>
         </p:txBody>
@@ -7082,7 +7508,7 @@
               </a:defRPr>
             </a:pPr>
             <a:r>
-              <a:t>CADENCE FINANCIAL GROUP  /  CASE STUDY 02</a:t>
+              <a:t>CADDET FINANCIAL GROUP  /  CASE STUDY 02</a:t>
             </a:r>
           </a:p>
         </p:txBody>
@@ -7345,7 +7771,7 @@
               </a:defRPr>
             </a:pPr>
             <a:r>
-              <a:t>Text analysis and PII detection | Interview walkthrough</a:t>
+              <a:t>Team 57</a:t>
             </a:r>
           </a:p>
         </p:txBody>
@@ -7465,7 +7891,7 @@
               </a:defRPr>
             </a:pPr>
             <a:r>
-              <a:t>CADENCE FINANCIAL GROUP  /  CASE STUDY 02</a:t>
+              <a:t>CADDET FINANCIAL GROUP  /  CASE STUDY 02</a:t>
             </a:r>
           </a:p>
         </p:txBody>
@@ -7728,7 +8154,7 @@
               </a:defRPr>
             </a:pPr>
             <a:r>
-              <a:t>Text analysis and PII detection | Interview walkthrough</a:t>
+              <a:t>Team 57</a:t>
             </a:r>
           </a:p>
         </p:txBody>
@@ -7848,7 +8274,7 @@
               </a:defRPr>
             </a:pPr>
             <a:r>
-              <a:t>CADENCE FINANCIAL GROUP  /  CASE STUDY 02</a:t>
+              <a:t>CADDET FINANCIAL GROUP  /  CASE STUDY 02</a:t>
             </a:r>
           </a:p>
         </p:txBody>
@@ -8111,7 +8537,7 @@
               </a:defRPr>
             </a:pPr>
             <a:r>
-              <a:t>Text analysis and PII detection | Interview walkthrough</a:t>
+              <a:t>Team 57</a:t>
             </a:r>
           </a:p>
         </p:txBody>
@@ -8231,7 +8657,7 @@
               </a:defRPr>
             </a:pPr>
             <a:r>
-              <a:t>CADENCE FINANCIAL GROUP  /  CASE STUDY 02</a:t>
+              <a:t>CADDET FINANCIAL GROUP  /  CASE STUDY 02</a:t>
             </a:r>
           </a:p>
         </p:txBody>
@@ -8494,7 +8920,7 @@
               </a:defRPr>
             </a:pPr>
             <a:r>
-              <a:t>Text analysis and PII detection | Interview walkthrough</a:t>
+              <a:t>Team 57</a:t>
             </a:r>
           </a:p>
         </p:txBody>
@@ -8614,7 +9040,7 @@
               </a:defRPr>
             </a:pPr>
             <a:r>
-              <a:t>CADENCE FINANCIAL GROUP  /  CASE STUDY 02</a:t>
+              <a:t>CADDET FINANCIAL GROUP  /  CASE STUDY 02</a:t>
             </a:r>
           </a:p>
         </p:txBody>
@@ -8877,7 +9303,7 @@
               </a:defRPr>
             </a:pPr>
             <a:r>
-              <a:t>Text analysis and PII detection | Interview walkthrough</a:t>
+              <a:t>Team 57</a:t>
             </a:r>
           </a:p>
         </p:txBody>
@@ -8997,7 +9423,7 @@
               </a:defRPr>
             </a:pPr>
             <a:r>
-              <a:t>CADENCE FINANCIAL GROUP  /  CASE STUDY 02</a:t>
+              <a:t>CADDET FINANCIAL GROUP  /  CASE STUDY 02</a:t>
             </a:r>
           </a:p>
         </p:txBody>
@@ -9260,7 +9686,7 @@
               </a:defRPr>
             </a:pPr>
             <a:r>
-              <a:t>Text analysis and PII detection | Interview walkthrough</a:t>
+              <a:t>Team 57</a:t>
             </a:r>
           </a:p>
         </p:txBody>
@@ -9380,7 +9806,7 @@
               </a:defRPr>
             </a:pPr>
             <a:r>
-              <a:t>CADENCE FINANCIAL GROUP  /  CASE STUDY 02</a:t>
+              <a:t>CADDET FINANCIAL GROUP  /  CASE STUDY 02</a:t>
             </a:r>
           </a:p>
         </p:txBody>
@@ -9540,7 +9966,7 @@
               </a:defRPr>
             </a:pPr>
             <a:r>
-              <a:t>Cadence employees use documents to support operational decisions.</a:t>
+              <a:t>Caddet employees use documents to support operational decisions.</a:t>
             </a:r>
           </a:p>
           <a:p>
@@ -9611,7 +10037,7 @@
               </a:defRPr>
             </a:pPr>
             <a:r>
-              <a:t>Text analysis and PII detection | Interview walkthrough</a:t>
+              <a:t>Team 57</a:t>
             </a:r>
           </a:p>
         </p:txBody>
@@ -9731,7 +10157,7 @@
               </a:defRPr>
             </a:pPr>
             <a:r>
-              <a:t>CADENCE FINANCIAL GROUP  /  CASE STUDY 02</a:t>
+              <a:t>CADDET FINANCIAL GROUP  /  CASE STUDY 02</a:t>
             </a:r>
           </a:p>
         </p:txBody>
@@ -9994,7 +10420,7 @@
               </a:defRPr>
             </a:pPr>
             <a:r>
-              <a:t>Text analysis and PII detection | Interview walkthrough</a:t>
+              <a:t>Team 57</a:t>
             </a:r>
           </a:p>
         </p:txBody>
@@ -10114,7 +10540,7 @@
               </a:defRPr>
             </a:pPr>
             <a:r>
-              <a:t>CADENCE FINANCIAL GROUP  /  CASE STUDY 02</a:t>
+              <a:t>CADDET FINANCIAL GROUP  /  CASE STUDY 02</a:t>
             </a:r>
           </a:p>
         </p:txBody>
@@ -10377,7 +10803,7 @@
               </a:defRPr>
             </a:pPr>
             <a:r>
-              <a:t>Text analysis and PII detection | Interview walkthrough</a:t>
+              <a:t>Team 57</a:t>
             </a:r>
           </a:p>
         </p:txBody>
@@ -10497,7 +10923,7 @@
               </a:defRPr>
             </a:pPr>
             <a:r>
-              <a:t>CADENCE FINANCIAL GROUP  /  CASE STUDY 02</a:t>
+              <a:t>CADDET FINANCIAL GROUP  /  CASE STUDY 02</a:t>
             </a:r>
           </a:p>
         </p:txBody>
@@ -10760,7 +11186,7 @@
               </a:defRPr>
             </a:pPr>
             <a:r>
-              <a:t>Technical discussion | Reference slides</a:t>
+              <a:t>Team 57</a:t>
             </a:r>
           </a:p>
         </p:txBody>
@@ -10880,7 +11306,7 @@
               </a:defRPr>
             </a:pPr>
             <a:r>
-              <a:t>CADENCE FINANCIAL GROUP  /  CASE STUDY 02</a:t>
+              <a:t>CADDET FINANCIAL GROUP  /  CASE STUDY 02</a:t>
             </a:r>
           </a:p>
         </p:txBody>
@@ -11143,7 +11569,7 @@
               </a:defRPr>
             </a:pPr>
             <a:r>
-              <a:t>Technical discussion | Reference slides</a:t>
+              <a:t>Team 57</a:t>
             </a:r>
           </a:p>
         </p:txBody>
@@ -11263,7 +11689,7 @@
               </a:defRPr>
             </a:pPr>
             <a:r>
-              <a:t>CADENCE FINANCIAL GROUP  /  CASE STUDY 02</a:t>
+              <a:t>CADDET FINANCIAL GROUP  /  CASE STUDY 02</a:t>
             </a:r>
           </a:p>
         </p:txBody>
@@ -11510,7 +11936,7 @@
               </a:defRPr>
             </a:pPr>
             <a:r>
-              <a:t>Technical discussion | Reference slides</a:t>
+              <a:t>Team 57</a:t>
             </a:r>
           </a:p>
         </p:txBody>
@@ -11550,6 +11976,1905 @@
             </a:pPr>
             <a:r>
               <a:t>24</a:t>
+            </a:r>
+          </a:p>
+        </p:txBody>
+      </p:sp>
+    </p:spTree>
+  </p:cSld>
+  <p:clrMapOvr>
+    <a:masterClrMapping/>
+  </p:clrMapOvr>
+</p:sld>
+</file>
+
+<file path=ppt/slides/slide25.xml><?xml version="1.0" encoding="utf-8"?>
+<p:sld xmlns:a="http://schemas.openxmlformats.org/drawingml/2006/main" xmlns:p="http://schemas.openxmlformats.org/presentationml/2006/main" xmlns:r="http://schemas.openxmlformats.org/officeDocument/2006/relationships">
+  <p:cSld>
+    <p:spTree>
+      <p:nvGrpSpPr>
+        <p:cNvPr id="1" name=""/>
+        <p:cNvGrpSpPr/>
+        <p:nvPr/>
+      </p:nvGrpSpPr>
+      <p:grpSpPr/>
+      <p:pic>
+        <p:nvPicPr>
+          <p:cNvPr id="2" name="Picture 1" descr="interview-background.png"/>
+          <p:cNvPicPr>
+            <a:picLocks noChangeAspect="1"/>
+          </p:cNvPicPr>
+          <p:nvPr/>
+        </p:nvPicPr>
+        <p:blipFill>
+          <a:blip r:embed="rId2"/>
+          <a:stretch>
+            <a:fillRect/>
+          </a:stretch>
+        </p:blipFill>
+        <p:spPr>
+          <a:xfrm>
+            <a:off x="0" y="0"/>
+            <a:ext cx="12191695" cy="6858000"/>
+          </a:xfrm>
+          <a:prstGeom prst="rect">
+            <a:avLst/>
+          </a:prstGeom>
+        </p:spPr>
+      </p:pic>
+      <p:sp>
+        <p:nvSpPr>
+          <p:cNvPr id="3" name="TextBox 2"/>
+          <p:cNvSpPr txBox="1"/>
+          <p:nvPr/>
+        </p:nvSpPr>
+        <p:spPr>
+          <a:xfrm>
+            <a:off x="548640" y="228600"/>
+            <a:ext cx="11064240" cy="411480"/>
+          </a:xfrm>
+          <a:prstGeom prst="rect">
+            <a:avLst/>
+          </a:prstGeom>
+          <a:noFill/>
+        </p:spPr>
+        <p:txBody>
+          <a:bodyPr wrap="square">
+            <a:spAutoFit/>
+          </a:bodyPr>
+          <a:lstStyle/>
+          <a:p>
+            <a:pPr>
+              <a:spcAft>
+                <a:spcPts val="1500"/>
+              </a:spcAft>
+              <a:defRPr sz="1300" b="1">
+                <a:solidFill>
+                  <a:srgbClr val="F5F5F0"/>
+                </a:solidFill>
+                <a:latin typeface="Calibri"/>
+              </a:defRPr>
+            </a:pPr>
+            <a:r>
+              <a:t>CADDET FINANCIAL GROUP  /  CASE STUDY 02</a:t>
+            </a:r>
+          </a:p>
+        </p:txBody>
+      </p:sp>
+      <p:sp>
+        <p:nvSpPr>
+          <p:cNvPr id="4" name="TextBox 3"/>
+          <p:cNvSpPr txBox="1"/>
+          <p:nvPr/>
+        </p:nvSpPr>
+        <p:spPr>
+          <a:xfrm>
+            <a:off x="594360" y="932688"/>
+            <a:ext cx="10972800" cy="914400"/>
+          </a:xfrm>
+          <a:prstGeom prst="rect">
+            <a:avLst/>
+          </a:prstGeom>
+          <a:noFill/>
+        </p:spPr>
+        <p:txBody>
+          <a:bodyPr wrap="square">
+            <a:spAutoFit/>
+          </a:bodyPr>
+          <a:lstStyle/>
+          <a:p>
+            <a:pPr>
+              <a:spcAft>
+                <a:spcPts val="1500"/>
+              </a:spcAft>
+              <a:defRPr sz="3200" b="1">
+                <a:solidFill>
+                  <a:srgbClr val="F5F5F0"/>
+                </a:solidFill>
+                <a:latin typeface="Calibri"/>
+              </a:defRPr>
+            </a:pPr>
+            <a:r>
+              <a:t>Worked examples from the supplied evidence</a:t>
+            </a:r>
+          </a:p>
+        </p:txBody>
+      </p:sp>
+      <p:sp>
+        <p:nvSpPr>
+          <p:cNvPr id="5" name="TextBox 4"/>
+          <p:cNvSpPr txBox="1"/>
+          <p:nvPr/>
+        </p:nvSpPr>
+        <p:spPr>
+          <a:xfrm>
+            <a:off x="640080" y="1847088"/>
+            <a:ext cx="10881360" cy="594360"/>
+          </a:xfrm>
+          <a:prstGeom prst="rect">
+            <a:avLst/>
+          </a:prstGeom>
+          <a:noFill/>
+        </p:spPr>
+        <p:txBody>
+          <a:bodyPr wrap="square">
+            <a:spAutoFit/>
+          </a:bodyPr>
+          <a:lstStyle/>
+          <a:p>
+            <a:pPr>
+              <a:spcAft>
+                <a:spcPts val="1500"/>
+              </a:spcAft>
+              <a:defRPr sz="2100" b="0">
+                <a:solidFill>
+                  <a:srgbClr val="BFCBD2"/>
+                </a:solidFill>
+                <a:latin typeface="Calibri"/>
+              </a:defRPr>
+            </a:pPr>
+            <a:r>
+              <a:t>Use these after the main explanation or during questions.</a:t>
+            </a:r>
+          </a:p>
+        </p:txBody>
+      </p:sp>
+      <p:sp>
+        <p:nvSpPr>
+          <p:cNvPr id="6" name="Rectangle 5"/>
+          <p:cNvSpPr/>
+          <p:nvPr/>
+        </p:nvSpPr>
+        <p:spPr>
+          <a:xfrm>
+            <a:off x="594360" y="2651760"/>
+            <a:ext cx="10972800" cy="3383280"/>
+          </a:xfrm>
+          <a:prstGeom prst="rect">
+            <a:avLst/>
+          </a:prstGeom>
+          <a:noFill/>
+          <a:ln w="12700">
+            <a:solidFill>
+              <a:srgbClr val="F0F0EB"/>
+            </a:solidFill>
+          </a:ln>
+        </p:spPr>
+        <p:style>
+          <a:lnRef idx="1">
+            <a:schemeClr val="accent1"/>
+          </a:lnRef>
+          <a:fillRef idx="3">
+            <a:schemeClr val="accent1"/>
+          </a:fillRef>
+          <a:effectRef idx="2">
+            <a:schemeClr val="accent1"/>
+          </a:effectRef>
+          <a:fontRef idx="minor">
+            <a:schemeClr val="lt1"/>
+          </a:fontRef>
+        </p:style>
+        <p:txBody>
+          <a:bodyPr rtlCol="0" anchor="ctr"/>
+          <a:lstStyle/>
+          <a:p>
+            <a:pPr algn="ctr"/>
+          </a:p>
+        </p:txBody>
+      </p:sp>
+      <p:sp>
+        <p:nvSpPr>
+          <p:cNvPr id="7" name="TextBox 6"/>
+          <p:cNvSpPr txBox="1"/>
+          <p:nvPr/>
+        </p:nvSpPr>
+        <p:spPr>
+          <a:xfrm>
+            <a:off x="850392" y="2852928"/>
+            <a:ext cx="10424160" cy="3017520"/>
+          </a:xfrm>
+          <a:prstGeom prst="rect">
+            <a:avLst/>
+          </a:prstGeom>
+          <a:noFill/>
+        </p:spPr>
+        <p:txBody>
+          <a:bodyPr wrap="square">
+            <a:spAutoFit/>
+          </a:bodyPr>
+          <a:lstStyle/>
+          <a:p>
+            <a:pPr>
+              <a:spcAft>
+                <a:spcPts val="1500"/>
+              </a:spcAft>
+              <a:defRPr sz="2100" b="0">
+                <a:solidFill>
+                  <a:srgbClr val="F5F5F0"/>
+                </a:solidFill>
+                <a:latin typeface="Calibri"/>
+              </a:defRPr>
+            </a:pPr>
+            <a:r>
+              <a:t>Organizational pack → native slide text and linked contact details.</a:t>
+            </a:r>
+          </a:p>
+          <a:p>
+            <a:pPr>
+              <a:spcAft>
+                <a:spcPts val="1500"/>
+              </a:spcAft>
+              <a:defRPr sz="2100" b="0">
+                <a:solidFill>
+                  <a:srgbClr val="F5F5F0"/>
+                </a:solidFill>
+                <a:latin typeface="Calibri"/>
+              </a:defRPr>
+            </a:pPr>
+            <a:r>
+              <a:t>Risk policy → scanned text, OCR locations and uncertainty.</a:t>
+            </a:r>
+          </a:p>
+          <a:p>
+            <a:pPr>
+              <a:spcAft>
+                <a:spcPts val="1500"/>
+              </a:spcAft>
+              <a:defRPr sz="2100" b="0">
+                <a:solidFill>
+                  <a:srgbClr val="F5F5F0"/>
+                </a:solidFill>
+                <a:latin typeface="Calibri"/>
+              </a:defRPr>
+            </a:pPr>
+            <a:r>
+              <a:t>TPRM training → process text, table relationships and embedded media.</a:t>
+            </a:r>
+          </a:p>
+          <a:p>
+            <a:pPr>
+              <a:spcAft>
+                <a:spcPts val="1500"/>
+              </a:spcAft>
+              <a:defRPr sz="2100" b="0">
+                <a:solidFill>
+                  <a:srgbClr val="F5F5F0"/>
+                </a:solidFill>
+                <a:latin typeface="Calibri"/>
+              </a:defRPr>
+            </a:pPr>
+            <a:r>
+              <a:t>The following examples show what to mask and what to preserve.</a:t>
+            </a:r>
+          </a:p>
+        </p:txBody>
+      </p:sp>
+      <p:sp>
+        <p:nvSpPr>
+          <p:cNvPr id="8" name="TextBox 7"/>
+          <p:cNvSpPr txBox="1"/>
+          <p:nvPr/>
+        </p:nvSpPr>
+        <p:spPr>
+          <a:xfrm>
+            <a:off x="640080" y="6355080"/>
+            <a:ext cx="10058400" cy="274320"/>
+          </a:xfrm>
+          <a:prstGeom prst="rect">
+            <a:avLst/>
+          </a:prstGeom>
+          <a:noFill/>
+        </p:spPr>
+        <p:txBody>
+          <a:bodyPr wrap="square">
+            <a:spAutoFit/>
+          </a:bodyPr>
+          <a:lstStyle/>
+          <a:p>
+            <a:pPr>
+              <a:spcAft>
+                <a:spcPts val="1500"/>
+              </a:spcAft>
+              <a:defRPr sz="1100" b="0">
+                <a:solidFill>
+                  <a:srgbClr val="BFCBD2"/>
+                </a:solidFill>
+                <a:latin typeface="Calibri"/>
+              </a:defRPr>
+            </a:pPr>
+            <a:r>
+              <a:t>Team 57</a:t>
+            </a:r>
+          </a:p>
+        </p:txBody>
+      </p:sp>
+      <p:sp>
+        <p:nvSpPr>
+          <p:cNvPr id="9" name="TextBox 8"/>
+          <p:cNvSpPr txBox="1"/>
+          <p:nvPr/>
+        </p:nvSpPr>
+        <p:spPr>
+          <a:xfrm>
+            <a:off x="10972800" y="6355080"/>
+            <a:ext cx="548640" cy="274320"/>
+          </a:xfrm>
+          <a:prstGeom prst="rect">
+            <a:avLst/>
+          </a:prstGeom>
+          <a:noFill/>
+        </p:spPr>
+        <p:txBody>
+          <a:bodyPr wrap="square">
+            <a:spAutoFit/>
+          </a:bodyPr>
+          <a:lstStyle/>
+          <a:p>
+            <a:pPr>
+              <a:spcAft>
+                <a:spcPts val="1500"/>
+              </a:spcAft>
+              <a:defRPr sz="1100" b="0">
+                <a:solidFill>
+                  <a:srgbClr val="F5F5F0"/>
+                </a:solidFill>
+                <a:latin typeface="Calibri"/>
+              </a:defRPr>
+            </a:pPr>
+            <a:r>
+              <a:t>25</a:t>
+            </a:r>
+          </a:p>
+        </p:txBody>
+      </p:sp>
+    </p:spTree>
+  </p:cSld>
+  <p:clrMapOvr>
+    <a:masterClrMapping/>
+  </p:clrMapOvr>
+</p:sld>
+</file>
+
+<file path=ppt/slides/slide26.xml><?xml version="1.0" encoding="utf-8"?>
+<p:sld xmlns:a="http://schemas.openxmlformats.org/drawingml/2006/main" xmlns:p="http://schemas.openxmlformats.org/presentationml/2006/main" xmlns:r="http://schemas.openxmlformats.org/officeDocument/2006/relationships">
+  <p:cSld>
+    <p:spTree>
+      <p:nvGrpSpPr>
+        <p:cNvPr id="1" name=""/>
+        <p:cNvGrpSpPr/>
+        <p:nvPr/>
+      </p:nvGrpSpPr>
+      <p:grpSpPr/>
+      <p:pic>
+        <p:nvPicPr>
+          <p:cNvPr id="2" name="Picture 1" descr="interview-background.png"/>
+          <p:cNvPicPr>
+            <a:picLocks noChangeAspect="1"/>
+          </p:cNvPicPr>
+          <p:nvPr/>
+        </p:nvPicPr>
+        <p:blipFill>
+          <a:blip r:embed="rId2"/>
+          <a:stretch>
+            <a:fillRect/>
+          </a:stretch>
+        </p:blipFill>
+        <p:spPr>
+          <a:xfrm>
+            <a:off x="0" y="0"/>
+            <a:ext cx="12191695" cy="6858000"/>
+          </a:xfrm>
+          <a:prstGeom prst="rect">
+            <a:avLst/>
+          </a:prstGeom>
+        </p:spPr>
+      </p:pic>
+      <p:sp>
+        <p:nvSpPr>
+          <p:cNvPr id="3" name="TextBox 2"/>
+          <p:cNvSpPr txBox="1"/>
+          <p:nvPr/>
+        </p:nvSpPr>
+        <p:spPr>
+          <a:xfrm>
+            <a:off x="548640" y="228600"/>
+            <a:ext cx="11064240" cy="411480"/>
+          </a:xfrm>
+          <a:prstGeom prst="rect">
+            <a:avLst/>
+          </a:prstGeom>
+          <a:noFill/>
+        </p:spPr>
+        <p:txBody>
+          <a:bodyPr wrap="square">
+            <a:spAutoFit/>
+          </a:bodyPr>
+          <a:lstStyle/>
+          <a:p>
+            <a:pPr>
+              <a:spcAft>
+                <a:spcPts val="1500"/>
+              </a:spcAft>
+              <a:defRPr sz="1300" b="1">
+                <a:solidFill>
+                  <a:srgbClr val="F5F5F0"/>
+                </a:solidFill>
+                <a:latin typeface="Calibri"/>
+              </a:defRPr>
+            </a:pPr>
+            <a:r>
+              <a:t>CADDET FINANCIAL GROUP  /  CASE STUDY 02</a:t>
+            </a:r>
+          </a:p>
+        </p:txBody>
+      </p:sp>
+      <p:sp>
+        <p:nvSpPr>
+          <p:cNvPr id="4" name="TextBox 3"/>
+          <p:cNvSpPr txBox="1"/>
+          <p:nvPr/>
+        </p:nvSpPr>
+        <p:spPr>
+          <a:xfrm>
+            <a:off x="594360" y="932688"/>
+            <a:ext cx="10972800" cy="914400"/>
+          </a:xfrm>
+          <a:prstGeom prst="rect">
+            <a:avLst/>
+          </a:prstGeom>
+          <a:noFill/>
+        </p:spPr>
+        <p:txBody>
+          <a:bodyPr wrap="square">
+            <a:spAutoFit/>
+          </a:bodyPr>
+          <a:lstStyle/>
+          <a:p>
+            <a:pPr>
+              <a:spcAft>
+                <a:spcPts val="1500"/>
+              </a:spcAft>
+              <a:defRPr sz="3200" b="1">
+                <a:solidFill>
+                  <a:srgbClr val="F5F5F0"/>
+                </a:solidFill>
+                <a:latin typeface="Calibri"/>
+              </a:defRPr>
+            </a:pPr>
+            <a:r>
+              <a:t>Example: organizational PowerPoint</a:t>
+            </a:r>
+          </a:p>
+        </p:txBody>
+      </p:sp>
+      <p:sp>
+        <p:nvSpPr>
+          <p:cNvPr id="5" name="TextBox 4"/>
+          <p:cNvSpPr txBox="1"/>
+          <p:nvPr/>
+        </p:nvSpPr>
+        <p:spPr>
+          <a:xfrm>
+            <a:off x="640080" y="1847088"/>
+            <a:ext cx="10881360" cy="594360"/>
+          </a:xfrm>
+          <a:prstGeom prst="rect">
+            <a:avLst/>
+          </a:prstGeom>
+          <a:noFill/>
+        </p:spPr>
+        <p:txBody>
+          <a:bodyPr wrap="square">
+            <a:spAutoFit/>
+          </a:bodyPr>
+          <a:lstStyle/>
+          <a:p>
+            <a:pPr>
+              <a:spcAft>
+                <a:spcPts val="1500"/>
+              </a:spcAft>
+              <a:defRPr sz="2100" b="0">
+                <a:solidFill>
+                  <a:srgbClr val="BFCBD2"/>
+                </a:solidFill>
+                <a:latin typeface="Calibri"/>
+              </a:defRPr>
+            </a:pPr>
+            <a:r>
+              <a:t>A contact email is sensitive; its reporting context remains useful.</a:t>
+            </a:r>
+          </a:p>
+        </p:txBody>
+      </p:sp>
+      <p:sp>
+        <p:nvSpPr>
+          <p:cNvPr id="6" name="Rectangle 5"/>
+          <p:cNvSpPr/>
+          <p:nvPr/>
+        </p:nvSpPr>
+        <p:spPr>
+          <a:xfrm>
+            <a:off x="594360" y="2651760"/>
+            <a:ext cx="10972800" cy="3383280"/>
+          </a:xfrm>
+          <a:prstGeom prst="rect">
+            <a:avLst/>
+          </a:prstGeom>
+          <a:noFill/>
+          <a:ln w="12700">
+            <a:solidFill>
+              <a:srgbClr val="F0F0EB"/>
+            </a:solidFill>
+          </a:ln>
+        </p:spPr>
+        <p:style>
+          <a:lnRef idx="1">
+            <a:schemeClr val="accent1"/>
+          </a:lnRef>
+          <a:fillRef idx="3">
+            <a:schemeClr val="accent1"/>
+          </a:fillRef>
+          <a:effectRef idx="2">
+            <a:schemeClr val="accent1"/>
+          </a:effectRef>
+          <a:fontRef idx="minor">
+            <a:schemeClr val="lt1"/>
+          </a:fontRef>
+        </p:style>
+        <p:txBody>
+          <a:bodyPr rtlCol="0" anchor="ctr"/>
+          <a:lstStyle/>
+          <a:p>
+            <a:pPr algn="ctr"/>
+          </a:p>
+        </p:txBody>
+      </p:sp>
+      <p:sp>
+        <p:nvSpPr>
+          <p:cNvPr id="7" name="TextBox 6"/>
+          <p:cNvSpPr txBox="1"/>
+          <p:nvPr/>
+        </p:nvSpPr>
+        <p:spPr>
+          <a:xfrm>
+            <a:off x="850392" y="2852928"/>
+            <a:ext cx="10424160" cy="3017520"/>
+          </a:xfrm>
+          <a:prstGeom prst="rect">
+            <a:avLst/>
+          </a:prstGeom>
+          <a:noFill/>
+        </p:spPr>
+        <p:txBody>
+          <a:bodyPr wrap="square">
+            <a:spAutoFit/>
+          </a:bodyPr>
+          <a:lstStyle/>
+          <a:p>
+            <a:pPr>
+              <a:spcAft>
+                <a:spcPts val="1500"/>
+              </a:spcAft>
+              <a:defRPr sz="2100" b="0">
+                <a:solidFill>
+                  <a:srgbClr val="F5F5F0"/>
+                </a:solidFill>
+                <a:latin typeface="Calibri"/>
+              </a:defRPr>
+            </a:pPr>
+            <a:r>
+              <a:t>SOURCE: Organizational Pack, slide 3, shape 12, paragraph 1.</a:t>
+            </a:r>
+          </a:p>
+          <a:p>
+            <a:pPr>
+              <a:spcAft>
+                <a:spcPts val="1500"/>
+              </a:spcAft>
+              <a:defRPr sz="2100" b="0">
+                <a:solidFill>
+                  <a:srgbClr val="F5F5F0"/>
+                </a:solidFill>
+                <a:latin typeface="Calibri"/>
+              </a:defRPr>
+            </a:pPr>
+            <a:r>
+              <a:t>EXTRACTED: m.vossberg@cadencefg.example</a:t>
+            </a:r>
+          </a:p>
+          <a:p>
+            <a:pPr>
+              <a:spcAft>
+                <a:spcPts val="1500"/>
+              </a:spcAft>
+              <a:defRPr sz="2100" b="0">
+                <a:solidFill>
+                  <a:srgbClr val="F5F5F0"/>
+                </a:solidFill>
+                <a:latin typeface="Calibri"/>
+              </a:defRPr>
+            </a:pPr>
+            <a:r>
+              <a:t>MASKED EXAMPLE: [EMAIL_1]</a:t>
+            </a:r>
+          </a:p>
+          <a:p>
+            <a:pPr>
+              <a:spcAft>
+                <a:spcPts val="1500"/>
+              </a:spcAft>
+              <a:defRPr sz="2100" b="0">
+                <a:solidFill>
+                  <a:srgbClr val="F5F5F0"/>
+                </a:solidFill>
+                <a:latin typeface="Calibri"/>
+              </a:defRPr>
+            </a:pPr>
+            <a:r>
+              <a:t>Keep the slide / shape location so a reviewer can find the original.</a:t>
+            </a:r>
+          </a:p>
+          <a:p>
+            <a:pPr>
+              <a:spcAft>
+                <a:spcPts val="1500"/>
+              </a:spcAft>
+              <a:defRPr sz="2100" b="0">
+                <a:solidFill>
+                  <a:srgbClr val="F5F5F0"/>
+                </a:solidFill>
+                <a:latin typeface="Calibri"/>
+              </a:defRPr>
+            </a:pPr>
+            <a:r>
+              <a:t>Do not remove the entire organizational chart just to mask a contact.</a:t>
+            </a:r>
+          </a:p>
+        </p:txBody>
+      </p:sp>
+      <p:sp>
+        <p:nvSpPr>
+          <p:cNvPr id="8" name="TextBox 7"/>
+          <p:cNvSpPr txBox="1"/>
+          <p:nvPr/>
+        </p:nvSpPr>
+        <p:spPr>
+          <a:xfrm>
+            <a:off x="640080" y="6355080"/>
+            <a:ext cx="10058400" cy="274320"/>
+          </a:xfrm>
+          <a:prstGeom prst="rect">
+            <a:avLst/>
+          </a:prstGeom>
+          <a:noFill/>
+        </p:spPr>
+        <p:txBody>
+          <a:bodyPr wrap="square">
+            <a:spAutoFit/>
+          </a:bodyPr>
+          <a:lstStyle/>
+          <a:p>
+            <a:pPr>
+              <a:spcAft>
+                <a:spcPts val="1500"/>
+              </a:spcAft>
+              <a:defRPr sz="1100" b="0">
+                <a:solidFill>
+                  <a:srgbClr val="BFCBD2"/>
+                </a:solidFill>
+                <a:latin typeface="Calibri"/>
+              </a:defRPr>
+            </a:pPr>
+            <a:r>
+              <a:t>Team 57</a:t>
+            </a:r>
+          </a:p>
+        </p:txBody>
+      </p:sp>
+      <p:sp>
+        <p:nvSpPr>
+          <p:cNvPr id="9" name="TextBox 8"/>
+          <p:cNvSpPr txBox="1"/>
+          <p:nvPr/>
+        </p:nvSpPr>
+        <p:spPr>
+          <a:xfrm>
+            <a:off x="10972800" y="6355080"/>
+            <a:ext cx="548640" cy="274320"/>
+          </a:xfrm>
+          <a:prstGeom prst="rect">
+            <a:avLst/>
+          </a:prstGeom>
+          <a:noFill/>
+        </p:spPr>
+        <p:txBody>
+          <a:bodyPr wrap="square">
+            <a:spAutoFit/>
+          </a:bodyPr>
+          <a:lstStyle/>
+          <a:p>
+            <a:pPr>
+              <a:spcAft>
+                <a:spcPts val="1500"/>
+              </a:spcAft>
+              <a:defRPr sz="1100" b="0">
+                <a:solidFill>
+                  <a:srgbClr val="F5F5F0"/>
+                </a:solidFill>
+                <a:latin typeface="Calibri"/>
+              </a:defRPr>
+            </a:pPr>
+            <a:r>
+              <a:t>26</a:t>
+            </a:r>
+          </a:p>
+        </p:txBody>
+      </p:sp>
+    </p:spTree>
+  </p:cSld>
+  <p:clrMapOvr>
+    <a:masterClrMapping/>
+  </p:clrMapOvr>
+</p:sld>
+</file>
+
+<file path=ppt/slides/slide27.xml><?xml version="1.0" encoding="utf-8"?>
+<p:sld xmlns:a="http://schemas.openxmlformats.org/drawingml/2006/main" xmlns:p="http://schemas.openxmlformats.org/presentationml/2006/main" xmlns:r="http://schemas.openxmlformats.org/officeDocument/2006/relationships">
+  <p:cSld>
+    <p:spTree>
+      <p:nvGrpSpPr>
+        <p:cNvPr id="1" name=""/>
+        <p:cNvGrpSpPr/>
+        <p:nvPr/>
+      </p:nvGrpSpPr>
+      <p:grpSpPr/>
+      <p:pic>
+        <p:nvPicPr>
+          <p:cNvPr id="2" name="Picture 1" descr="interview-background.png"/>
+          <p:cNvPicPr>
+            <a:picLocks noChangeAspect="1"/>
+          </p:cNvPicPr>
+          <p:nvPr/>
+        </p:nvPicPr>
+        <p:blipFill>
+          <a:blip r:embed="rId2"/>
+          <a:stretch>
+            <a:fillRect/>
+          </a:stretch>
+        </p:blipFill>
+        <p:spPr>
+          <a:xfrm>
+            <a:off x="0" y="0"/>
+            <a:ext cx="12191695" cy="6858000"/>
+          </a:xfrm>
+          <a:prstGeom prst="rect">
+            <a:avLst/>
+          </a:prstGeom>
+        </p:spPr>
+      </p:pic>
+      <p:sp>
+        <p:nvSpPr>
+          <p:cNvPr id="3" name="TextBox 2"/>
+          <p:cNvSpPr txBox="1"/>
+          <p:nvPr/>
+        </p:nvSpPr>
+        <p:spPr>
+          <a:xfrm>
+            <a:off x="548640" y="228600"/>
+            <a:ext cx="11064240" cy="411480"/>
+          </a:xfrm>
+          <a:prstGeom prst="rect">
+            <a:avLst/>
+          </a:prstGeom>
+          <a:noFill/>
+        </p:spPr>
+        <p:txBody>
+          <a:bodyPr wrap="square">
+            <a:spAutoFit/>
+          </a:bodyPr>
+          <a:lstStyle/>
+          <a:p>
+            <a:pPr>
+              <a:spcAft>
+                <a:spcPts val="1500"/>
+              </a:spcAft>
+              <a:defRPr sz="1300" b="1">
+                <a:solidFill>
+                  <a:srgbClr val="F5F5F0"/>
+                </a:solidFill>
+                <a:latin typeface="Calibri"/>
+              </a:defRPr>
+            </a:pPr>
+            <a:r>
+              <a:t>CADDET FINANCIAL GROUP  /  CASE STUDY 02</a:t>
+            </a:r>
+          </a:p>
+        </p:txBody>
+      </p:sp>
+      <p:sp>
+        <p:nvSpPr>
+          <p:cNvPr id="4" name="TextBox 3"/>
+          <p:cNvSpPr txBox="1"/>
+          <p:nvPr/>
+        </p:nvSpPr>
+        <p:spPr>
+          <a:xfrm>
+            <a:off x="594360" y="932688"/>
+            <a:ext cx="10972800" cy="914400"/>
+          </a:xfrm>
+          <a:prstGeom prst="rect">
+            <a:avLst/>
+          </a:prstGeom>
+          <a:noFill/>
+        </p:spPr>
+        <p:txBody>
+          <a:bodyPr wrap="square">
+            <a:spAutoFit/>
+          </a:bodyPr>
+          <a:lstStyle/>
+          <a:p>
+            <a:pPr>
+              <a:spcAft>
+                <a:spcPts val="1500"/>
+              </a:spcAft>
+              <a:defRPr sz="3200" b="1">
+                <a:solidFill>
+                  <a:srgbClr val="F5F5F0"/>
+                </a:solidFill>
+                <a:latin typeface="Calibri"/>
+              </a:defRPr>
+            </a:pPr>
+            <a:r>
+              <a:t>Example: scanned risk policy</a:t>
+            </a:r>
+          </a:p>
+        </p:txBody>
+      </p:sp>
+      <p:sp>
+        <p:nvSpPr>
+          <p:cNvPr id="5" name="TextBox 4"/>
+          <p:cNvSpPr txBox="1"/>
+          <p:nvPr/>
+        </p:nvSpPr>
+        <p:spPr>
+          <a:xfrm>
+            <a:off x="640080" y="1847088"/>
+            <a:ext cx="10881360" cy="594360"/>
+          </a:xfrm>
+          <a:prstGeom prst="rect">
+            <a:avLst/>
+          </a:prstGeom>
+          <a:noFill/>
+        </p:spPr>
+        <p:txBody>
+          <a:bodyPr wrap="square">
+            <a:spAutoFit/>
+          </a:bodyPr>
+          <a:lstStyle/>
+          <a:p>
+            <a:pPr>
+              <a:spcAft>
+                <a:spcPts val="1500"/>
+              </a:spcAft>
+              <a:defRPr sz="2100" b="0">
+                <a:solidFill>
+                  <a:srgbClr val="BFCBD2"/>
+                </a:solidFill>
+                <a:latin typeface="Calibri"/>
+              </a:defRPr>
+            </a:pPr>
+            <a:r>
+              <a:t>One OCR line contains an email and two phone numbers.</a:t>
+            </a:r>
+          </a:p>
+        </p:txBody>
+      </p:sp>
+      <p:sp>
+        <p:nvSpPr>
+          <p:cNvPr id="6" name="Rectangle 5"/>
+          <p:cNvSpPr/>
+          <p:nvPr/>
+        </p:nvSpPr>
+        <p:spPr>
+          <a:xfrm>
+            <a:off x="594360" y="2651760"/>
+            <a:ext cx="10972800" cy="3383280"/>
+          </a:xfrm>
+          <a:prstGeom prst="rect">
+            <a:avLst/>
+          </a:prstGeom>
+          <a:noFill/>
+          <a:ln w="12700">
+            <a:solidFill>
+              <a:srgbClr val="F0F0EB"/>
+            </a:solidFill>
+          </a:ln>
+        </p:spPr>
+        <p:style>
+          <a:lnRef idx="1">
+            <a:schemeClr val="accent1"/>
+          </a:lnRef>
+          <a:fillRef idx="3">
+            <a:schemeClr val="accent1"/>
+          </a:fillRef>
+          <a:effectRef idx="2">
+            <a:schemeClr val="accent1"/>
+          </a:effectRef>
+          <a:fontRef idx="minor">
+            <a:schemeClr val="lt1"/>
+          </a:fontRef>
+        </p:style>
+        <p:txBody>
+          <a:bodyPr rtlCol="0" anchor="ctr"/>
+          <a:lstStyle/>
+          <a:p>
+            <a:pPr algn="ctr"/>
+          </a:p>
+        </p:txBody>
+      </p:sp>
+      <p:sp>
+        <p:nvSpPr>
+          <p:cNvPr id="7" name="TextBox 6"/>
+          <p:cNvSpPr txBox="1"/>
+          <p:nvPr/>
+        </p:nvSpPr>
+        <p:spPr>
+          <a:xfrm>
+            <a:off x="850392" y="2852928"/>
+            <a:ext cx="10424160" cy="3017520"/>
+          </a:xfrm>
+          <a:prstGeom prst="rect">
+            <a:avLst/>
+          </a:prstGeom>
+          <a:noFill/>
+        </p:spPr>
+        <p:txBody>
+          <a:bodyPr wrap="square">
+            <a:spAutoFit/>
+          </a:bodyPr>
+          <a:lstStyle/>
+          <a:p>
+            <a:pPr>
+              <a:spcAft>
+                <a:spcPts val="1500"/>
+              </a:spcAft>
+              <a:defRPr sz="2100" b="0">
+                <a:solidFill>
+                  <a:srgbClr val="F5F5F0"/>
+                </a:solidFill>
+                <a:latin typeface="Calibri"/>
+              </a:defRPr>
+            </a:pPr>
+            <a:r>
+              <a:t>SOURCE: Risk Management Policy, page 1, OCR line 8.</a:t>
+            </a:r>
+          </a:p>
+          <a:p>
+            <a:pPr>
+              <a:spcAft>
+                <a:spcPts val="1500"/>
+              </a:spcAft>
+              <a:defRPr sz="2100" b="0">
+                <a:solidFill>
+                  <a:srgbClr val="F5F5F0"/>
+                </a:solidFill>
+                <a:latin typeface="Calibri"/>
+              </a:defRPr>
+            </a:pPr>
+            <a:r>
+              <a:t>EXTRACTED: m.achebe@cadencefg.com | +1 (212) 555-0147 | mobile +1 (917) 555-0143</a:t>
+            </a:r>
+          </a:p>
+          <a:p>
+            <a:pPr>
+              <a:spcAft>
+                <a:spcPts val="1500"/>
+              </a:spcAft>
+              <a:defRPr sz="2100" b="0">
+                <a:solidFill>
+                  <a:srgbClr val="F5F5F0"/>
+                </a:solidFill>
+                <a:latin typeface="Calibri"/>
+              </a:defRPr>
+            </a:pPr>
+            <a:r>
+              <a:t>MASKED EXAMPLE: [EMAIL_1] | [PHONE_1] | mobile [PHONE_2]</a:t>
+            </a:r>
+          </a:p>
+          <a:p>
+            <a:pPr>
+              <a:spcAft>
+                <a:spcPts val="1500"/>
+              </a:spcAft>
+              <a:defRPr sz="2100" b="0">
+                <a:solidFill>
+                  <a:srgbClr val="F5F5F0"/>
+                </a:solidFill>
+                <a:latin typeface="Calibri"/>
+              </a:defRPr>
+            </a:pPr>
+            <a:r>
+              <a:t>Keep the word “mobile”, the separators and the page location.</a:t>
+            </a:r>
+          </a:p>
+          <a:p>
+            <a:pPr>
+              <a:spcAft>
+                <a:spcPts val="1500"/>
+              </a:spcAft>
+              <a:defRPr sz="2100" b="0">
+                <a:solidFill>
+                  <a:srgbClr val="F5F5F0"/>
+                </a:solidFill>
+                <a:latin typeface="Calibri"/>
+              </a:defRPr>
+            </a:pPr>
+            <a:r>
+              <a:t>A readable line does not prove the rest of the scan is complete.</a:t>
+            </a:r>
+          </a:p>
+        </p:txBody>
+      </p:sp>
+      <p:sp>
+        <p:nvSpPr>
+          <p:cNvPr id="8" name="TextBox 7"/>
+          <p:cNvSpPr txBox="1"/>
+          <p:nvPr/>
+        </p:nvSpPr>
+        <p:spPr>
+          <a:xfrm>
+            <a:off x="640080" y="6355080"/>
+            <a:ext cx="10058400" cy="274320"/>
+          </a:xfrm>
+          <a:prstGeom prst="rect">
+            <a:avLst/>
+          </a:prstGeom>
+          <a:noFill/>
+        </p:spPr>
+        <p:txBody>
+          <a:bodyPr wrap="square">
+            <a:spAutoFit/>
+          </a:bodyPr>
+          <a:lstStyle/>
+          <a:p>
+            <a:pPr>
+              <a:spcAft>
+                <a:spcPts val="1500"/>
+              </a:spcAft>
+              <a:defRPr sz="1100" b="0">
+                <a:solidFill>
+                  <a:srgbClr val="BFCBD2"/>
+                </a:solidFill>
+                <a:latin typeface="Calibri"/>
+              </a:defRPr>
+            </a:pPr>
+            <a:r>
+              <a:t>Team 57</a:t>
+            </a:r>
+          </a:p>
+        </p:txBody>
+      </p:sp>
+      <p:sp>
+        <p:nvSpPr>
+          <p:cNvPr id="9" name="TextBox 8"/>
+          <p:cNvSpPr txBox="1"/>
+          <p:nvPr/>
+        </p:nvSpPr>
+        <p:spPr>
+          <a:xfrm>
+            <a:off x="10972800" y="6355080"/>
+            <a:ext cx="548640" cy="274320"/>
+          </a:xfrm>
+          <a:prstGeom prst="rect">
+            <a:avLst/>
+          </a:prstGeom>
+          <a:noFill/>
+        </p:spPr>
+        <p:txBody>
+          <a:bodyPr wrap="square">
+            <a:spAutoFit/>
+          </a:bodyPr>
+          <a:lstStyle/>
+          <a:p>
+            <a:pPr>
+              <a:spcAft>
+                <a:spcPts val="1500"/>
+              </a:spcAft>
+              <a:defRPr sz="1100" b="0">
+                <a:solidFill>
+                  <a:srgbClr val="F5F5F0"/>
+                </a:solidFill>
+                <a:latin typeface="Calibri"/>
+              </a:defRPr>
+            </a:pPr>
+            <a:r>
+              <a:t>27</a:t>
+            </a:r>
+          </a:p>
+        </p:txBody>
+      </p:sp>
+    </p:spTree>
+  </p:cSld>
+  <p:clrMapOvr>
+    <a:masterClrMapping/>
+  </p:clrMapOvr>
+</p:sld>
+</file>
+
+<file path=ppt/slides/slide28.xml><?xml version="1.0" encoding="utf-8"?>
+<p:sld xmlns:a="http://schemas.openxmlformats.org/drawingml/2006/main" xmlns:p="http://schemas.openxmlformats.org/presentationml/2006/main" xmlns:r="http://schemas.openxmlformats.org/officeDocument/2006/relationships">
+  <p:cSld>
+    <p:spTree>
+      <p:nvGrpSpPr>
+        <p:cNvPr id="1" name=""/>
+        <p:cNvGrpSpPr/>
+        <p:nvPr/>
+      </p:nvGrpSpPr>
+      <p:grpSpPr/>
+      <p:pic>
+        <p:nvPicPr>
+          <p:cNvPr id="2" name="Picture 1" descr="interview-background.png"/>
+          <p:cNvPicPr>
+            <a:picLocks noChangeAspect="1"/>
+          </p:cNvPicPr>
+          <p:nvPr/>
+        </p:nvPicPr>
+        <p:blipFill>
+          <a:blip r:embed="rId2"/>
+          <a:stretch>
+            <a:fillRect/>
+          </a:stretch>
+        </p:blipFill>
+        <p:spPr>
+          <a:xfrm>
+            <a:off x="0" y="0"/>
+            <a:ext cx="12191695" cy="6858000"/>
+          </a:xfrm>
+          <a:prstGeom prst="rect">
+            <a:avLst/>
+          </a:prstGeom>
+        </p:spPr>
+      </p:pic>
+      <p:sp>
+        <p:nvSpPr>
+          <p:cNvPr id="3" name="TextBox 2"/>
+          <p:cNvSpPr txBox="1"/>
+          <p:nvPr/>
+        </p:nvSpPr>
+        <p:spPr>
+          <a:xfrm>
+            <a:off x="548640" y="228600"/>
+            <a:ext cx="11064240" cy="411480"/>
+          </a:xfrm>
+          <a:prstGeom prst="rect">
+            <a:avLst/>
+          </a:prstGeom>
+          <a:noFill/>
+        </p:spPr>
+        <p:txBody>
+          <a:bodyPr wrap="square">
+            <a:spAutoFit/>
+          </a:bodyPr>
+          <a:lstStyle/>
+          <a:p>
+            <a:pPr>
+              <a:spcAft>
+                <a:spcPts val="1500"/>
+              </a:spcAft>
+              <a:defRPr sz="1300" b="1">
+                <a:solidFill>
+                  <a:srgbClr val="F5F5F0"/>
+                </a:solidFill>
+                <a:latin typeface="Calibri"/>
+              </a:defRPr>
+            </a:pPr>
+            <a:r>
+              <a:t>CADDET FINANCIAL GROUP  /  CASE STUDY 02</a:t>
+            </a:r>
+          </a:p>
+        </p:txBody>
+      </p:sp>
+      <p:sp>
+        <p:nvSpPr>
+          <p:cNvPr id="4" name="TextBox 3"/>
+          <p:cNvSpPr txBox="1"/>
+          <p:nvPr/>
+        </p:nvSpPr>
+        <p:spPr>
+          <a:xfrm>
+            <a:off x="594360" y="932688"/>
+            <a:ext cx="10972800" cy="914400"/>
+          </a:xfrm>
+          <a:prstGeom prst="rect">
+            <a:avLst/>
+          </a:prstGeom>
+          <a:noFill/>
+        </p:spPr>
+        <p:txBody>
+          <a:bodyPr wrap="square">
+            <a:spAutoFit/>
+          </a:bodyPr>
+          <a:lstStyle/>
+          <a:p>
+            <a:pPr>
+              <a:spcAft>
+                <a:spcPts val="1500"/>
+              </a:spcAft>
+              <a:defRPr sz="3200" b="1">
+                <a:solidFill>
+                  <a:srgbClr val="F5F5F0"/>
+                </a:solidFill>
+                <a:latin typeface="Calibri"/>
+              </a:defRPr>
+            </a:pPr>
+            <a:r>
+              <a:t>Example: TPRM training document</a:t>
+            </a:r>
+          </a:p>
+        </p:txBody>
+      </p:sp>
+      <p:sp>
+        <p:nvSpPr>
+          <p:cNvPr id="5" name="TextBox 4"/>
+          <p:cNvSpPr txBox="1"/>
+          <p:nvPr/>
+        </p:nvSpPr>
+        <p:spPr>
+          <a:xfrm>
+            <a:off x="640080" y="1847088"/>
+            <a:ext cx="10881360" cy="594360"/>
+          </a:xfrm>
+          <a:prstGeom prst="rect">
+            <a:avLst/>
+          </a:prstGeom>
+          <a:noFill/>
+        </p:spPr>
+        <p:txBody>
+          <a:bodyPr wrap="square">
+            <a:spAutoFit/>
+          </a:bodyPr>
+          <a:lstStyle/>
+          <a:p>
+            <a:pPr>
+              <a:spcAft>
+                <a:spcPts val="1500"/>
+              </a:spcAft>
+              <a:defRPr sz="2100" b="0">
+                <a:solidFill>
+                  <a:srgbClr val="BFCBD2"/>
+                </a:solidFill>
+                <a:latin typeface="Calibri"/>
+              </a:defRPr>
+            </a:pPr>
+            <a:r>
+              <a:t>Business process language should survive the privacy review.</a:t>
+            </a:r>
+          </a:p>
+        </p:txBody>
+      </p:sp>
+      <p:sp>
+        <p:nvSpPr>
+          <p:cNvPr id="6" name="Rectangle 5"/>
+          <p:cNvSpPr/>
+          <p:nvPr/>
+        </p:nvSpPr>
+        <p:spPr>
+          <a:xfrm>
+            <a:off x="594360" y="2651760"/>
+            <a:ext cx="10972800" cy="3383280"/>
+          </a:xfrm>
+          <a:prstGeom prst="rect">
+            <a:avLst/>
+          </a:prstGeom>
+          <a:noFill/>
+          <a:ln w="12700">
+            <a:solidFill>
+              <a:srgbClr val="F0F0EB"/>
+            </a:solidFill>
+          </a:ln>
+        </p:spPr>
+        <p:style>
+          <a:lnRef idx="1">
+            <a:schemeClr val="accent1"/>
+          </a:lnRef>
+          <a:fillRef idx="3">
+            <a:schemeClr val="accent1"/>
+          </a:fillRef>
+          <a:effectRef idx="2">
+            <a:schemeClr val="accent1"/>
+          </a:effectRef>
+          <a:fontRef idx="minor">
+            <a:schemeClr val="lt1"/>
+          </a:fontRef>
+        </p:style>
+        <p:txBody>
+          <a:bodyPr rtlCol="0" anchor="ctr"/>
+          <a:lstStyle/>
+          <a:p>
+            <a:pPr algn="ctr"/>
+          </a:p>
+        </p:txBody>
+      </p:sp>
+      <p:sp>
+        <p:nvSpPr>
+          <p:cNvPr id="7" name="TextBox 6"/>
+          <p:cNvSpPr txBox="1"/>
+          <p:nvPr/>
+        </p:nvSpPr>
+        <p:spPr>
+          <a:xfrm>
+            <a:off x="850392" y="2852928"/>
+            <a:ext cx="10424160" cy="3017520"/>
+          </a:xfrm>
+          <a:prstGeom prst="rect">
+            <a:avLst/>
+          </a:prstGeom>
+          <a:noFill/>
+        </p:spPr>
+        <p:txBody>
+          <a:bodyPr wrap="square">
+            <a:spAutoFit/>
+          </a:bodyPr>
+          <a:lstStyle/>
+          <a:p>
+            <a:pPr>
+              <a:spcAft>
+                <a:spcPts val="1500"/>
+              </a:spcAft>
+              <a:defRPr sz="2100" b="0">
+                <a:solidFill>
+                  <a:srgbClr val="F5F5F0"/>
+                </a:solidFill>
+                <a:latin typeface="Calibri"/>
+              </a:defRPr>
+            </a:pPr>
+            <a:r>
+              <a:t>SOURCE: TPRM Training, document paragraph 12.</a:t>
+            </a:r>
+          </a:p>
+          <a:p>
+            <a:pPr>
+              <a:spcAft>
+                <a:spcPts val="1500"/>
+              </a:spcAft>
+              <a:defRPr sz="2100" b="0">
+                <a:solidFill>
+                  <a:srgbClr val="F5F5F0"/>
+                </a:solidFill>
+                <a:latin typeface="Calibri"/>
+              </a:defRPr>
+            </a:pPr>
+            <a:r>
+              <a:t>“Establishing vendor onboarding attributes to streamline supplier risk processes.”</a:t>
+            </a:r>
+          </a:p>
+          <a:p>
+            <a:pPr>
+              <a:spcAft>
+                <a:spcPts val="1500"/>
+              </a:spcAft>
+              <a:defRPr sz="2100" b="0">
+                <a:solidFill>
+                  <a:srgbClr val="F5F5F0"/>
+                </a:solidFill>
+                <a:latin typeface="Calibri"/>
+              </a:defRPr>
+            </a:pPr>
+            <a:r>
+              <a:t>This sentence describes work; it does not identify a particular person.</a:t>
+            </a:r>
+          </a:p>
+          <a:p>
+            <a:pPr>
+              <a:spcAft>
+                <a:spcPts val="1500"/>
+              </a:spcAft>
+              <a:defRPr sz="2100" b="0">
+                <a:solidFill>
+                  <a:srgbClr val="F5F5F0"/>
+                </a:solidFill>
+                <a:latin typeface="Calibri"/>
+              </a:defRPr>
+            </a:pPr>
+            <a:r>
+              <a:t>Preserve it while inspecting nearby tables and screenshots for identifiers.</a:t>
+            </a:r>
+          </a:p>
+          <a:p>
+            <a:pPr>
+              <a:spcAft>
+                <a:spcPts val="1500"/>
+              </a:spcAft>
+              <a:defRPr sz="2100" b="0">
+                <a:solidFill>
+                  <a:srgbClr val="F5F5F0"/>
+                </a:solidFill>
+                <a:latin typeface="Calibri"/>
+              </a:defRPr>
+            </a:pPr>
+            <a:r>
+              <a:t>A clean paragraph is not evidence that every embedded image is clean.</a:t>
+            </a:r>
+          </a:p>
+        </p:txBody>
+      </p:sp>
+      <p:sp>
+        <p:nvSpPr>
+          <p:cNvPr id="8" name="TextBox 7"/>
+          <p:cNvSpPr txBox="1"/>
+          <p:nvPr/>
+        </p:nvSpPr>
+        <p:spPr>
+          <a:xfrm>
+            <a:off x="640080" y="6355080"/>
+            <a:ext cx="10058400" cy="274320"/>
+          </a:xfrm>
+          <a:prstGeom prst="rect">
+            <a:avLst/>
+          </a:prstGeom>
+          <a:noFill/>
+        </p:spPr>
+        <p:txBody>
+          <a:bodyPr wrap="square">
+            <a:spAutoFit/>
+          </a:bodyPr>
+          <a:lstStyle/>
+          <a:p>
+            <a:pPr>
+              <a:spcAft>
+                <a:spcPts val="1500"/>
+              </a:spcAft>
+              <a:defRPr sz="1100" b="0">
+                <a:solidFill>
+                  <a:srgbClr val="BFCBD2"/>
+                </a:solidFill>
+                <a:latin typeface="Calibri"/>
+              </a:defRPr>
+            </a:pPr>
+            <a:r>
+              <a:t>Team 57</a:t>
+            </a:r>
+          </a:p>
+        </p:txBody>
+      </p:sp>
+      <p:sp>
+        <p:nvSpPr>
+          <p:cNvPr id="9" name="TextBox 8"/>
+          <p:cNvSpPr txBox="1"/>
+          <p:nvPr/>
+        </p:nvSpPr>
+        <p:spPr>
+          <a:xfrm>
+            <a:off x="10972800" y="6355080"/>
+            <a:ext cx="548640" cy="274320"/>
+          </a:xfrm>
+          <a:prstGeom prst="rect">
+            <a:avLst/>
+          </a:prstGeom>
+          <a:noFill/>
+        </p:spPr>
+        <p:txBody>
+          <a:bodyPr wrap="square">
+            <a:spAutoFit/>
+          </a:bodyPr>
+          <a:lstStyle/>
+          <a:p>
+            <a:pPr>
+              <a:spcAft>
+                <a:spcPts val="1500"/>
+              </a:spcAft>
+              <a:defRPr sz="1100" b="0">
+                <a:solidFill>
+                  <a:srgbClr val="F5F5F0"/>
+                </a:solidFill>
+                <a:latin typeface="Calibri"/>
+              </a:defRPr>
+            </a:pPr>
+            <a:r>
+              <a:t>28</a:t>
+            </a:r>
+          </a:p>
+        </p:txBody>
+      </p:sp>
+    </p:spTree>
+  </p:cSld>
+  <p:clrMapOvr>
+    <a:masterClrMapping/>
+  </p:clrMapOvr>
+</p:sld>
+</file>
+
+<file path=ppt/slides/slide29.xml><?xml version="1.0" encoding="utf-8"?>
+<p:sld xmlns:a="http://schemas.openxmlformats.org/drawingml/2006/main" xmlns:p="http://schemas.openxmlformats.org/presentationml/2006/main" xmlns:r="http://schemas.openxmlformats.org/officeDocument/2006/relationships">
+  <p:cSld>
+    <p:spTree>
+      <p:nvGrpSpPr>
+        <p:cNvPr id="1" name=""/>
+        <p:cNvGrpSpPr/>
+        <p:nvPr/>
+      </p:nvGrpSpPr>
+      <p:grpSpPr/>
+      <p:pic>
+        <p:nvPicPr>
+          <p:cNvPr id="2" name="Picture 1" descr="interview-background.png"/>
+          <p:cNvPicPr>
+            <a:picLocks noChangeAspect="1"/>
+          </p:cNvPicPr>
+          <p:nvPr/>
+        </p:nvPicPr>
+        <p:blipFill>
+          <a:blip r:embed="rId2"/>
+          <a:stretch>
+            <a:fillRect/>
+          </a:stretch>
+        </p:blipFill>
+        <p:spPr>
+          <a:xfrm>
+            <a:off x="0" y="0"/>
+            <a:ext cx="12191695" cy="6858000"/>
+          </a:xfrm>
+          <a:prstGeom prst="rect">
+            <a:avLst/>
+          </a:prstGeom>
+        </p:spPr>
+      </p:pic>
+      <p:sp>
+        <p:nvSpPr>
+          <p:cNvPr id="3" name="TextBox 2"/>
+          <p:cNvSpPr txBox="1"/>
+          <p:nvPr/>
+        </p:nvSpPr>
+        <p:spPr>
+          <a:xfrm>
+            <a:off x="548640" y="228600"/>
+            <a:ext cx="11064240" cy="411480"/>
+          </a:xfrm>
+          <a:prstGeom prst="rect">
+            <a:avLst/>
+          </a:prstGeom>
+          <a:noFill/>
+        </p:spPr>
+        <p:txBody>
+          <a:bodyPr wrap="square">
+            <a:spAutoFit/>
+          </a:bodyPr>
+          <a:lstStyle/>
+          <a:p>
+            <a:pPr>
+              <a:spcAft>
+                <a:spcPts val="1500"/>
+              </a:spcAft>
+              <a:defRPr sz="1300" b="1">
+                <a:solidFill>
+                  <a:srgbClr val="F5F5F0"/>
+                </a:solidFill>
+                <a:latin typeface="Calibri"/>
+              </a:defRPr>
+            </a:pPr>
+            <a:r>
+              <a:t>CADDET FINANCIAL GROUP  /  CASE STUDY 02</a:t>
+            </a:r>
+          </a:p>
+        </p:txBody>
+      </p:sp>
+      <p:sp>
+        <p:nvSpPr>
+          <p:cNvPr id="4" name="TextBox 3"/>
+          <p:cNvSpPr txBox="1"/>
+          <p:nvPr/>
+        </p:nvSpPr>
+        <p:spPr>
+          <a:xfrm>
+            <a:off x="594360" y="932688"/>
+            <a:ext cx="10972800" cy="914400"/>
+          </a:xfrm>
+          <a:prstGeom prst="rect">
+            <a:avLst/>
+          </a:prstGeom>
+          <a:noFill/>
+        </p:spPr>
+        <p:txBody>
+          <a:bodyPr wrap="square">
+            <a:spAutoFit/>
+          </a:bodyPr>
+          <a:lstStyle/>
+          <a:p>
+            <a:pPr>
+              <a:spcAft>
+                <a:spcPts val="1500"/>
+              </a:spcAft>
+              <a:defRPr sz="3200" b="1">
+                <a:solidFill>
+                  <a:srgbClr val="F5F5F0"/>
+                </a:solidFill>
+                <a:latin typeface="Calibri"/>
+              </a:defRPr>
+            </a:pPr>
+            <a:r>
+              <a:t>Example: retain the table relationship</a:t>
+            </a:r>
+          </a:p>
+        </p:txBody>
+      </p:sp>
+      <p:sp>
+        <p:nvSpPr>
+          <p:cNvPr id="5" name="TextBox 4"/>
+          <p:cNvSpPr txBox="1"/>
+          <p:nvPr/>
+        </p:nvSpPr>
+        <p:spPr>
+          <a:xfrm>
+            <a:off x="640080" y="1847088"/>
+            <a:ext cx="10881360" cy="594360"/>
+          </a:xfrm>
+          <a:prstGeom prst="rect">
+            <a:avLst/>
+          </a:prstGeom>
+          <a:noFill/>
+        </p:spPr>
+        <p:txBody>
+          <a:bodyPr wrap="square">
+            <a:spAutoFit/>
+          </a:bodyPr>
+          <a:lstStyle/>
+          <a:p>
+            <a:pPr>
+              <a:spcAft>
+                <a:spcPts val="1500"/>
+              </a:spcAft>
+              <a:defRPr sz="2100" b="0">
+                <a:solidFill>
+                  <a:srgbClr val="BFCBD2"/>
+                </a:solidFill>
+                <a:latin typeface="Calibri"/>
+              </a:defRPr>
+            </a:pPr>
+            <a:r>
+              <a:t>Location metadata makes a finding explainable in a long Word document.</a:t>
+            </a:r>
+          </a:p>
+        </p:txBody>
+      </p:sp>
+      <p:sp>
+        <p:nvSpPr>
+          <p:cNvPr id="6" name="Rectangle 5"/>
+          <p:cNvSpPr/>
+          <p:nvPr/>
+        </p:nvSpPr>
+        <p:spPr>
+          <a:xfrm>
+            <a:off x="594360" y="2651760"/>
+            <a:ext cx="10972800" cy="3383280"/>
+          </a:xfrm>
+          <a:prstGeom prst="rect">
+            <a:avLst/>
+          </a:prstGeom>
+          <a:noFill/>
+          <a:ln w="12700">
+            <a:solidFill>
+              <a:srgbClr val="F0F0EB"/>
+            </a:solidFill>
+          </a:ln>
+        </p:spPr>
+        <p:style>
+          <a:lnRef idx="1">
+            <a:schemeClr val="accent1"/>
+          </a:lnRef>
+          <a:fillRef idx="3">
+            <a:schemeClr val="accent1"/>
+          </a:fillRef>
+          <a:effectRef idx="2">
+            <a:schemeClr val="accent1"/>
+          </a:effectRef>
+          <a:fontRef idx="minor">
+            <a:schemeClr val="lt1"/>
+          </a:fontRef>
+        </p:style>
+        <p:txBody>
+          <a:bodyPr rtlCol="0" anchor="ctr"/>
+          <a:lstStyle/>
+          <a:p>
+            <a:pPr algn="ctr"/>
+          </a:p>
+        </p:txBody>
+      </p:sp>
+      <p:sp>
+        <p:nvSpPr>
+          <p:cNvPr id="7" name="TextBox 6"/>
+          <p:cNvSpPr txBox="1"/>
+          <p:nvPr/>
+        </p:nvSpPr>
+        <p:spPr>
+          <a:xfrm>
+            <a:off x="850392" y="2852928"/>
+            <a:ext cx="10424160" cy="3017520"/>
+          </a:xfrm>
+          <a:prstGeom prst="rect">
+            <a:avLst/>
+          </a:prstGeom>
+          <a:noFill/>
+        </p:spPr>
+        <p:txBody>
+          <a:bodyPr wrap="square">
+            <a:spAutoFit/>
+          </a:bodyPr>
+          <a:lstStyle/>
+          <a:p>
+            <a:pPr>
+              <a:spcAft>
+                <a:spcPts val="1500"/>
+              </a:spcAft>
+              <a:defRPr sz="2100" b="0">
+                <a:solidFill>
+                  <a:srgbClr val="F5F5F0"/>
+                </a:solidFill>
+                <a:latin typeface="Calibri"/>
+              </a:defRPr>
+            </a:pPr>
+            <a:r>
+              <a:t>SOURCE: TPRM Training, table 13, row 1, column 2.</a:t>
+            </a:r>
+          </a:p>
+          <a:p>
+            <a:pPr>
+              <a:spcAft>
+                <a:spcPts val="1500"/>
+              </a:spcAft>
+              <a:defRPr sz="2100" b="0">
+                <a:solidFill>
+                  <a:srgbClr val="F5F5F0"/>
+                </a:solidFill>
+                <a:latin typeface="Calibri"/>
+              </a:defRPr>
+            </a:pPr>
+            <a:r>
+              <a:t>“When a new assessment is sent to the Primary Vendor Contact, it must be completed within the specified timeline.”</a:t>
+            </a:r>
+          </a:p>
+          <a:p>
+            <a:pPr>
+              <a:spcAft>
+                <a:spcPts val="1500"/>
+              </a:spcAft>
+              <a:defRPr sz="2100" b="0">
+                <a:solidFill>
+                  <a:srgbClr val="F5F5F0"/>
+                </a:solidFill>
+                <a:latin typeface="Calibri"/>
+              </a:defRPr>
+            </a:pPr>
+            <a:r>
+              <a:t>Primary Vendor Contact is a role label, not a named individual here.</a:t>
+            </a:r>
+          </a:p>
+          <a:p>
+            <a:pPr>
+              <a:spcAft>
+                <a:spcPts val="1500"/>
+              </a:spcAft>
+              <a:defRPr sz="2100" b="0">
+                <a:solidFill>
+                  <a:srgbClr val="F5F5F0"/>
+                </a:solidFill>
+                <a:latin typeface="Calibri"/>
+              </a:defRPr>
+            </a:pPr>
+            <a:r>
+              <a:t>Keep the workflow instruction and its row / column association.</a:t>
+            </a:r>
+          </a:p>
+          <a:p>
+            <a:pPr>
+              <a:spcAft>
+                <a:spcPts val="1500"/>
+              </a:spcAft>
+              <a:defRPr sz="2100" b="0">
+                <a:solidFill>
+                  <a:srgbClr val="F5F5F0"/>
+                </a:solidFill>
+                <a:latin typeface="Calibri"/>
+              </a:defRPr>
+            </a:pPr>
+            <a:r>
+              <a:t>If a real contact name appears elsewhere, mask that specific span.</a:t>
+            </a:r>
+          </a:p>
+        </p:txBody>
+      </p:sp>
+      <p:sp>
+        <p:nvSpPr>
+          <p:cNvPr id="8" name="TextBox 7"/>
+          <p:cNvSpPr txBox="1"/>
+          <p:nvPr/>
+        </p:nvSpPr>
+        <p:spPr>
+          <a:xfrm>
+            <a:off x="640080" y="6355080"/>
+            <a:ext cx="10058400" cy="274320"/>
+          </a:xfrm>
+          <a:prstGeom prst="rect">
+            <a:avLst/>
+          </a:prstGeom>
+          <a:noFill/>
+        </p:spPr>
+        <p:txBody>
+          <a:bodyPr wrap="square">
+            <a:spAutoFit/>
+          </a:bodyPr>
+          <a:lstStyle/>
+          <a:p>
+            <a:pPr>
+              <a:spcAft>
+                <a:spcPts val="1500"/>
+              </a:spcAft>
+              <a:defRPr sz="1100" b="0">
+                <a:solidFill>
+                  <a:srgbClr val="BFCBD2"/>
+                </a:solidFill>
+                <a:latin typeface="Calibri"/>
+              </a:defRPr>
+            </a:pPr>
+            <a:r>
+              <a:t>Team 57</a:t>
+            </a:r>
+          </a:p>
+        </p:txBody>
+      </p:sp>
+      <p:sp>
+        <p:nvSpPr>
+          <p:cNvPr id="9" name="TextBox 8"/>
+          <p:cNvSpPr txBox="1"/>
+          <p:nvPr/>
+        </p:nvSpPr>
+        <p:spPr>
+          <a:xfrm>
+            <a:off x="10972800" y="6355080"/>
+            <a:ext cx="548640" cy="274320"/>
+          </a:xfrm>
+          <a:prstGeom prst="rect">
+            <a:avLst/>
+          </a:prstGeom>
+          <a:noFill/>
+        </p:spPr>
+        <p:txBody>
+          <a:bodyPr wrap="square">
+            <a:spAutoFit/>
+          </a:bodyPr>
+          <a:lstStyle/>
+          <a:p>
+            <a:pPr>
+              <a:spcAft>
+                <a:spcPts val="1500"/>
+              </a:spcAft>
+              <a:defRPr sz="1100" b="0">
+                <a:solidFill>
+                  <a:srgbClr val="F5F5F0"/>
+                </a:solidFill>
+                <a:latin typeface="Calibri"/>
+              </a:defRPr>
+            </a:pPr>
+            <a:r>
+              <a:t>29</a:t>
             </a:r>
           </a:p>
         </p:txBody>
@@ -11630,7 +13955,7 @@
               </a:defRPr>
             </a:pPr>
             <a:r>
-              <a:t>CADENCE FINANCIAL GROUP  /  CASE STUDY 02</a:t>
+              <a:t>CADDET FINANCIAL GROUP  /  CASE STUDY 02</a:t>
             </a:r>
           </a:p>
         </p:txBody>
@@ -11893,7 +14218,7 @@
               </a:defRPr>
             </a:pPr>
             <a:r>
-              <a:t>Text analysis and PII detection | Interview walkthrough</a:t>
+              <a:t>Team 57</a:t>
             </a:r>
           </a:p>
         </p:txBody>
@@ -11933,6 +14258,389 @@
             </a:pPr>
             <a:r>
               <a:t>03</a:t>
+            </a:r>
+          </a:p>
+        </p:txBody>
+      </p:sp>
+    </p:spTree>
+  </p:cSld>
+  <p:clrMapOvr>
+    <a:masterClrMapping/>
+  </p:clrMapOvr>
+</p:sld>
+</file>
+
+<file path=ppt/slides/slide30.xml><?xml version="1.0" encoding="utf-8"?>
+<p:sld xmlns:a="http://schemas.openxmlformats.org/drawingml/2006/main" xmlns:p="http://schemas.openxmlformats.org/presentationml/2006/main" xmlns:r="http://schemas.openxmlformats.org/officeDocument/2006/relationships">
+  <p:cSld>
+    <p:spTree>
+      <p:nvGrpSpPr>
+        <p:cNvPr id="1" name=""/>
+        <p:cNvGrpSpPr/>
+        <p:nvPr/>
+      </p:nvGrpSpPr>
+      <p:grpSpPr/>
+      <p:pic>
+        <p:nvPicPr>
+          <p:cNvPr id="2" name="Picture 1" descr="interview-background.png"/>
+          <p:cNvPicPr>
+            <a:picLocks noChangeAspect="1"/>
+          </p:cNvPicPr>
+          <p:nvPr/>
+        </p:nvPicPr>
+        <p:blipFill>
+          <a:blip r:embed="rId2"/>
+          <a:stretch>
+            <a:fillRect/>
+          </a:stretch>
+        </p:blipFill>
+        <p:spPr>
+          <a:xfrm>
+            <a:off x="0" y="0"/>
+            <a:ext cx="12191695" cy="6858000"/>
+          </a:xfrm>
+          <a:prstGeom prst="rect">
+            <a:avLst/>
+          </a:prstGeom>
+        </p:spPr>
+      </p:pic>
+      <p:sp>
+        <p:nvSpPr>
+          <p:cNvPr id="3" name="TextBox 2"/>
+          <p:cNvSpPr txBox="1"/>
+          <p:nvPr/>
+        </p:nvSpPr>
+        <p:spPr>
+          <a:xfrm>
+            <a:off x="548640" y="228600"/>
+            <a:ext cx="11064240" cy="411480"/>
+          </a:xfrm>
+          <a:prstGeom prst="rect">
+            <a:avLst/>
+          </a:prstGeom>
+          <a:noFill/>
+        </p:spPr>
+        <p:txBody>
+          <a:bodyPr wrap="square">
+            <a:spAutoFit/>
+          </a:bodyPr>
+          <a:lstStyle/>
+          <a:p>
+            <a:pPr>
+              <a:spcAft>
+                <a:spcPts val="1500"/>
+              </a:spcAft>
+              <a:defRPr sz="1300" b="1">
+                <a:solidFill>
+                  <a:srgbClr val="F5F5F0"/>
+                </a:solidFill>
+                <a:latin typeface="Calibri"/>
+              </a:defRPr>
+            </a:pPr>
+            <a:r>
+              <a:t>CADDET FINANCIAL GROUP  /  CASE STUDY 02</a:t>
+            </a:r>
+          </a:p>
+        </p:txBody>
+      </p:sp>
+      <p:sp>
+        <p:nvSpPr>
+          <p:cNvPr id="4" name="TextBox 3"/>
+          <p:cNvSpPr txBox="1"/>
+          <p:nvPr/>
+        </p:nvSpPr>
+        <p:spPr>
+          <a:xfrm>
+            <a:off x="594360" y="932688"/>
+            <a:ext cx="10972800" cy="914400"/>
+          </a:xfrm>
+          <a:prstGeom prst="rect">
+            <a:avLst/>
+          </a:prstGeom>
+          <a:noFill/>
+        </p:spPr>
+        <p:txBody>
+          <a:bodyPr wrap="square">
+            <a:spAutoFit/>
+          </a:bodyPr>
+          <a:lstStyle/>
+          <a:p>
+            <a:pPr>
+              <a:spcAft>
+                <a:spcPts val="1500"/>
+              </a:spcAft>
+              <a:defRPr sz="3200" b="1">
+                <a:solidFill>
+                  <a:srgbClr val="F5F5F0"/>
+                </a:solidFill>
+                <a:latin typeface="Calibri"/>
+              </a:defRPr>
+            </a:pPr>
+            <a:r>
+              <a:t>How to explain the three examples to judges</a:t>
+            </a:r>
+          </a:p>
+        </p:txBody>
+      </p:sp>
+      <p:sp>
+        <p:nvSpPr>
+          <p:cNvPr id="5" name="TextBox 4"/>
+          <p:cNvSpPr txBox="1"/>
+          <p:nvPr/>
+        </p:nvSpPr>
+        <p:spPr>
+          <a:xfrm>
+            <a:off x="640080" y="1847088"/>
+            <a:ext cx="10881360" cy="594360"/>
+          </a:xfrm>
+          <a:prstGeom prst="rect">
+            <a:avLst/>
+          </a:prstGeom>
+          <a:noFill/>
+        </p:spPr>
+        <p:txBody>
+          <a:bodyPr wrap="square">
+            <a:spAutoFit/>
+          </a:bodyPr>
+          <a:lstStyle/>
+          <a:p>
+            <a:pPr>
+              <a:spcAft>
+                <a:spcPts val="1500"/>
+              </a:spcAft>
+              <a:defRPr sz="2100" b="0">
+                <a:solidFill>
+                  <a:srgbClr val="BFCBD2"/>
+                </a:solidFill>
+                <a:latin typeface="Calibri"/>
+              </a:defRPr>
+            </a:pPr>
+            <a:r>
+              <a:t>Connect the observed content to the release decision.</a:t>
+            </a:r>
+          </a:p>
+        </p:txBody>
+      </p:sp>
+      <p:sp>
+        <p:nvSpPr>
+          <p:cNvPr id="6" name="Rectangle 5"/>
+          <p:cNvSpPr/>
+          <p:nvPr/>
+        </p:nvSpPr>
+        <p:spPr>
+          <a:xfrm>
+            <a:off x="594360" y="2651760"/>
+            <a:ext cx="10972800" cy="3383280"/>
+          </a:xfrm>
+          <a:prstGeom prst="rect">
+            <a:avLst/>
+          </a:prstGeom>
+          <a:noFill/>
+          <a:ln w="12700">
+            <a:solidFill>
+              <a:srgbClr val="F0F0EB"/>
+            </a:solidFill>
+          </a:ln>
+        </p:spPr>
+        <p:style>
+          <a:lnRef idx="1">
+            <a:schemeClr val="accent1"/>
+          </a:lnRef>
+          <a:fillRef idx="3">
+            <a:schemeClr val="accent1"/>
+          </a:fillRef>
+          <a:effectRef idx="2">
+            <a:schemeClr val="accent1"/>
+          </a:effectRef>
+          <a:fontRef idx="minor">
+            <a:schemeClr val="lt1"/>
+          </a:fontRef>
+        </p:style>
+        <p:txBody>
+          <a:bodyPr rtlCol="0" anchor="ctr"/>
+          <a:lstStyle/>
+          <a:p>
+            <a:pPr algn="ctr"/>
+          </a:p>
+        </p:txBody>
+      </p:sp>
+      <p:sp>
+        <p:nvSpPr>
+          <p:cNvPr id="7" name="TextBox 6"/>
+          <p:cNvSpPr txBox="1"/>
+          <p:nvPr/>
+        </p:nvSpPr>
+        <p:spPr>
+          <a:xfrm>
+            <a:off x="850392" y="2852928"/>
+            <a:ext cx="10424160" cy="3017520"/>
+          </a:xfrm>
+          <a:prstGeom prst="rect">
+            <a:avLst/>
+          </a:prstGeom>
+          <a:noFill/>
+        </p:spPr>
+        <p:txBody>
+          <a:bodyPr wrap="square">
+            <a:spAutoFit/>
+          </a:bodyPr>
+          <a:lstStyle/>
+          <a:p>
+            <a:pPr>
+              <a:spcAft>
+                <a:spcPts val="1500"/>
+              </a:spcAft>
+              <a:defRPr sz="2100" b="0">
+                <a:solidFill>
+                  <a:srgbClr val="F5F5F0"/>
+                </a:solidFill>
+                <a:latin typeface="Calibri"/>
+              </a:defRPr>
+            </a:pPr>
+            <a:r>
+              <a:t>PPTX: show the source location, email finding and typed placeholder.</a:t>
+            </a:r>
+          </a:p>
+          <a:p>
+            <a:pPr>
+              <a:spcAft>
+                <a:spcPts val="1500"/>
+              </a:spcAft>
+              <a:defRPr sz="2100" b="0">
+                <a:solidFill>
+                  <a:srgbClr val="F5F5F0"/>
+                </a:solidFill>
+                <a:latin typeface="Calibri"/>
+              </a:defRPr>
+            </a:pPr>
+            <a:r>
+              <a:t>PDF: explain OCR confidence, then show why uncertainty can block export.</a:t>
+            </a:r>
+          </a:p>
+          <a:p>
+            <a:pPr>
+              <a:spcAft>
+                <a:spcPts val="1500"/>
+              </a:spcAft>
+              <a:defRPr sz="2100" b="0">
+                <a:solidFill>
+                  <a:srgbClr val="F5F5F0"/>
+                </a:solidFill>
+                <a:latin typeface="Calibri"/>
+              </a:defRPr>
+            </a:pPr>
+            <a:r>
+              <a:t>DOCX: preserve process / role language while reviewing tables and media.</a:t>
+            </a:r>
+          </a:p>
+          <a:p>
+            <a:pPr>
+              <a:spcAft>
+                <a:spcPts val="1500"/>
+              </a:spcAft>
+              <a:defRPr sz="2100" b="0">
+                <a:solidFill>
+                  <a:srgbClr val="F5F5F0"/>
+                </a:solidFill>
+                <a:latin typeface="Calibri"/>
+              </a:defRPr>
+            </a:pPr>
+            <a:r>
+              <a:t>Finish with the masked preview and the actual allowed / blocked state.</a:t>
+            </a:r>
+          </a:p>
+          <a:p>
+            <a:pPr>
+              <a:spcAft>
+                <a:spcPts val="1500"/>
+              </a:spcAft>
+              <a:defRPr sz="2100" b="0">
+                <a:solidFill>
+                  <a:srgbClr val="F5F5F0"/>
+                </a:solidFill>
+                <a:latin typeface="Calibri"/>
+              </a:defRPr>
+            </a:pPr>
+            <a:r>
+              <a:t>Use labeled source review to measure coverage; examples alone cannot prove it.</a:t>
+            </a:r>
+          </a:p>
+        </p:txBody>
+      </p:sp>
+      <p:sp>
+        <p:nvSpPr>
+          <p:cNvPr id="8" name="TextBox 7"/>
+          <p:cNvSpPr txBox="1"/>
+          <p:nvPr/>
+        </p:nvSpPr>
+        <p:spPr>
+          <a:xfrm>
+            <a:off x="640080" y="6355080"/>
+            <a:ext cx="10058400" cy="274320"/>
+          </a:xfrm>
+          <a:prstGeom prst="rect">
+            <a:avLst/>
+          </a:prstGeom>
+          <a:noFill/>
+        </p:spPr>
+        <p:txBody>
+          <a:bodyPr wrap="square">
+            <a:spAutoFit/>
+          </a:bodyPr>
+          <a:lstStyle/>
+          <a:p>
+            <a:pPr>
+              <a:spcAft>
+                <a:spcPts val="1500"/>
+              </a:spcAft>
+              <a:defRPr sz="1100" b="0">
+                <a:solidFill>
+                  <a:srgbClr val="BFCBD2"/>
+                </a:solidFill>
+                <a:latin typeface="Calibri"/>
+              </a:defRPr>
+            </a:pPr>
+            <a:r>
+              <a:t>Team 57</a:t>
+            </a:r>
+          </a:p>
+        </p:txBody>
+      </p:sp>
+      <p:sp>
+        <p:nvSpPr>
+          <p:cNvPr id="9" name="TextBox 8"/>
+          <p:cNvSpPr txBox="1"/>
+          <p:nvPr/>
+        </p:nvSpPr>
+        <p:spPr>
+          <a:xfrm>
+            <a:off x="10972800" y="6355080"/>
+            <a:ext cx="548640" cy="274320"/>
+          </a:xfrm>
+          <a:prstGeom prst="rect">
+            <a:avLst/>
+          </a:prstGeom>
+          <a:noFill/>
+        </p:spPr>
+        <p:txBody>
+          <a:bodyPr wrap="square">
+            <a:spAutoFit/>
+          </a:bodyPr>
+          <a:lstStyle/>
+          <a:p>
+            <a:pPr>
+              <a:spcAft>
+                <a:spcPts val="1500"/>
+              </a:spcAft>
+              <a:defRPr sz="1100" b="0">
+                <a:solidFill>
+                  <a:srgbClr val="F5F5F0"/>
+                </a:solidFill>
+                <a:latin typeface="Calibri"/>
+              </a:defRPr>
+            </a:pPr>
+            <a:r>
+              <a:t>30</a:t>
             </a:r>
           </a:p>
         </p:txBody>
@@ -12013,7 +14721,7 @@
               </a:defRPr>
             </a:pPr>
             <a:r>
-              <a:t>CADENCE FINANCIAL GROUP  /  CASE STUDY 02</a:t>
+              <a:t>CADDET FINANCIAL GROUP  /  CASE STUDY 02</a:t>
             </a:r>
           </a:p>
         </p:txBody>
@@ -12260,7 +14968,7 @@
               </a:defRPr>
             </a:pPr>
             <a:r>
-              <a:t>Text analysis and PII detection | Interview walkthrough</a:t>
+              <a:t>Team 57</a:t>
             </a:r>
           </a:p>
         </p:txBody>
@@ -12380,7 +15088,7 @@
               </a:defRPr>
             </a:pPr>
             <a:r>
-              <a:t>CADENCE FINANCIAL GROUP  /  CASE STUDY 02</a:t>
+              <a:t>CADDET FINANCIAL GROUP  /  CASE STUDY 02</a:t>
             </a:r>
           </a:p>
         </p:txBody>
@@ -12627,7 +15335,7 @@
               </a:defRPr>
             </a:pPr>
             <a:r>
-              <a:t>Text analysis and PII detection | Interview walkthrough</a:t>
+              <a:t>Team 57</a:t>
             </a:r>
           </a:p>
         </p:txBody>
@@ -12747,7 +15455,7 @@
               </a:defRPr>
             </a:pPr>
             <a:r>
-              <a:t>CADENCE FINANCIAL GROUP  /  CASE STUDY 02</a:t>
+              <a:t>CADDET FINANCIAL GROUP  /  CASE STUDY 02</a:t>
             </a:r>
           </a:p>
         </p:txBody>
@@ -13010,7 +15718,7 @@
               </a:defRPr>
             </a:pPr>
             <a:r>
-              <a:t>Text analysis and PII detection | Interview walkthrough</a:t>
+              <a:t>Team 57</a:t>
             </a:r>
           </a:p>
         </p:txBody>
@@ -13130,7 +15838,7 @@
               </a:defRPr>
             </a:pPr>
             <a:r>
-              <a:t>CADENCE FINANCIAL GROUP  /  CASE STUDY 02</a:t>
+              <a:t>CADDET FINANCIAL GROUP  /  CASE STUDY 02</a:t>
             </a:r>
           </a:p>
         </p:txBody>
@@ -13377,7 +16085,7 @@
               </a:defRPr>
             </a:pPr>
             <a:r>
-              <a:t>Text analysis and PII detection | Interview walkthrough</a:t>
+              <a:t>Team 57</a:t>
             </a:r>
           </a:p>
         </p:txBody>
@@ -13497,7 +16205,7 @@
               </a:defRPr>
             </a:pPr>
             <a:r>
-              <a:t>CADENCE FINANCIAL GROUP  /  CASE STUDY 02</a:t>
+              <a:t>CADDET FINANCIAL GROUP  /  CASE STUDY 02</a:t>
             </a:r>
           </a:p>
         </p:txBody>
@@ -13760,7 +16468,7 @@
               </a:defRPr>
             </a:pPr>
             <a:r>
-              <a:t>Text analysis and PII detection | Interview walkthrough</a:t>
+              <a:t>Team 57</a:t>
             </a:r>
           </a:p>
         </p:txBody>
@@ -13880,7 +16588,7 @@
               </a:defRPr>
             </a:pPr>
             <a:r>
-              <a:t>CADENCE FINANCIAL GROUP  /  CASE STUDY 02</a:t>
+              <a:t>CADDET FINANCIAL GROUP  /  CASE STUDY 02</a:t>
             </a:r>
           </a:p>
         </p:txBody>
@@ -14143,7 +16851,7 @@
               </a:defRPr>
             </a:pPr>
             <a:r>
-              <a:t>Text analysis and PII detection | Interview walkthrough</a:t>
+              <a:t>Team 57</a:t>
             </a:r>
           </a:p>
         </p:txBody>
